--- a/prez/prez.pptx
+++ b/prez/prez.pptx
@@ -6776,7 +6776,7 @@
                       </a:pPr>
                       <a:r>
                         <a:rPr lang="ru-RU" dirty="0"/>
-                        <a:t>13,07</a:t>
+                        <a:t>11,68</a:t>
                       </a:r>
                       <a:endParaRPr lang="en-US" sz="1600" dirty="0">
                         <a:effectLst/>
@@ -6795,7 +6795,7 @@
                       </a:pPr>
                       <a:r>
                         <a:rPr lang="ru-RU" dirty="0"/>
-                        <a:t>13,14</a:t>
+                        <a:t>11,76</a:t>
                       </a:r>
                       <a:endParaRPr lang="en-US" sz="1600" dirty="0">
                         <a:effectLst/>
@@ -6814,7 +6814,7 @@
                       </a:pPr>
                       <a:r>
                         <a:rPr lang="ru-RU" dirty="0"/>
-                        <a:t>15,41</a:t>
+                        <a:t>15,50</a:t>
                       </a:r>
                       <a:endParaRPr lang="en-US" sz="1600" dirty="0">
                         <a:effectLst/>
@@ -6859,7 +6859,7 @@
                       </a:pPr>
                       <a:r>
                         <a:rPr lang="ru-RU" dirty="0"/>
-                        <a:t>3,31</a:t>
+                        <a:t>3,69</a:t>
                       </a:r>
                       <a:endParaRPr lang="en-US" sz="1600" dirty="0">
                         <a:effectLst/>
@@ -6878,7 +6878,7 @@
                       </a:pPr>
                       <a:r>
                         <a:rPr lang="ru-RU" dirty="0"/>
-                        <a:t>3,41</a:t>
+                        <a:t>4,66</a:t>
                       </a:r>
                       <a:endParaRPr lang="en-US" sz="1600" dirty="0">
                         <a:effectLst/>
@@ -6897,7 +6897,7 @@
                       </a:pPr>
                       <a:r>
                         <a:rPr lang="ru-RU" dirty="0"/>
-                        <a:t>5,33</a:t>
+                        <a:t>11,57</a:t>
                       </a:r>
                       <a:endParaRPr lang="en-US" sz="1600" dirty="0">
                         <a:effectLst/>
@@ -7091,7 +7091,7 @@
           <a:p>
             <a:r>
               <a:rPr lang="ru-RU" sz="2400" dirty="0"/>
-              <a:t>Доказана эффективность использования предвычисленных витрин (ускорение в 31,5 раз) и целевых B-</a:t>
+              <a:t>Доказана эффективность использования предвычисленных витрин (ускорение в 31 раз) и целевых B-</a:t>
             </a:r>
             <a:r>
               <a:rPr lang="ru-RU" sz="2400" dirty="0" err="1"/>

--- a/prez/prez.pptx
+++ b/prez/prez.pptx
@@ -5,7 +5,7 @@
     <p:sldMasterId id="2147483648" r:id="rId1"/>
   </p:sldMasterIdLst>
   <p:notesMasterIdLst>
-    <p:notesMasterId r:id="rId18"/>
+    <p:notesMasterId r:id="rId19"/>
   </p:notesMasterIdLst>
   <p:sldIdLst>
     <p:sldId id="256" r:id="rId2"/>
@@ -13,17 +13,18 @@
     <p:sldId id="258" r:id="rId4"/>
     <p:sldId id="259" r:id="rId5"/>
     <p:sldId id="260" r:id="rId6"/>
-    <p:sldId id="261" r:id="rId7"/>
-    <p:sldId id="262" r:id="rId8"/>
-    <p:sldId id="263" r:id="rId9"/>
-    <p:sldId id="272" r:id="rId10"/>
-    <p:sldId id="267" r:id="rId11"/>
-    <p:sldId id="268" r:id="rId12"/>
-    <p:sldId id="275" r:id="rId13"/>
-    <p:sldId id="269" r:id="rId14"/>
-    <p:sldId id="273" r:id="rId15"/>
-    <p:sldId id="274" r:id="rId16"/>
-    <p:sldId id="271" r:id="rId17"/>
+    <p:sldId id="276" r:id="rId7"/>
+    <p:sldId id="261" r:id="rId8"/>
+    <p:sldId id="262" r:id="rId9"/>
+    <p:sldId id="263" r:id="rId10"/>
+    <p:sldId id="272" r:id="rId11"/>
+    <p:sldId id="267" r:id="rId12"/>
+    <p:sldId id="268" r:id="rId13"/>
+    <p:sldId id="275" r:id="rId14"/>
+    <p:sldId id="269" r:id="rId15"/>
+    <p:sldId id="273" r:id="rId16"/>
+    <p:sldId id="274" r:id="rId17"/>
+    <p:sldId id="271" r:id="rId18"/>
   </p:sldIdLst>
   <p:sldSz cx="12192000" cy="6858000"/>
   <p:notesSz cx="6858000" cy="9144000"/>
@@ -223,7 +224,7 @@
           <a:p>
             <a:fld id="{9534C4FF-5296-F440-8A99-26742BCF3BE3}" type="datetimeFigureOut">
               <a:rPr lang="en-US" smtClean="0"/>
-              <a:t>6/3/2026</a:t>
+              <a:t>6/7/2026</a:t>
             </a:fld>
             <a:endParaRPr lang="en-US"/>
           </a:p>
@@ -637,7 +638,7 @@
           <a:p>
             <a:fld id="{B57C869F-F4EF-2944-906D-51151E3A4E1C}" type="datetime1">
               <a:rPr lang="en-US" smtClean="0"/>
-              <a:t>6/3/2026</a:t>
+              <a:t>6/7/2026</a:t>
             </a:fld>
             <a:endParaRPr lang="en-US"/>
           </a:p>
@@ -835,7 +836,7 @@
           <a:p>
             <a:fld id="{8D4D78EE-9966-5B4E-959F-86C895F1DFC7}" type="datetime1">
               <a:rPr lang="en-US" smtClean="0"/>
-              <a:t>6/3/2026</a:t>
+              <a:t>6/7/2026</a:t>
             </a:fld>
             <a:endParaRPr lang="en-US"/>
           </a:p>
@@ -1043,7 +1044,7 @@
           <a:p>
             <a:fld id="{1B938C08-9193-7C4F-8305-3D1CE11FCB84}" type="datetime1">
               <a:rPr lang="en-US" smtClean="0"/>
-              <a:t>6/3/2026</a:t>
+              <a:t>6/7/2026</a:t>
             </a:fld>
             <a:endParaRPr lang="en-US"/>
           </a:p>
@@ -1241,7 +1242,7 @@
           <a:p>
             <a:fld id="{71EFBE53-00DA-0441-9A7C-21012EABDCEB}" type="datetime1">
               <a:rPr lang="en-US" smtClean="0"/>
-              <a:t>6/3/2026</a:t>
+              <a:t>6/7/2026</a:t>
             </a:fld>
             <a:endParaRPr lang="en-US"/>
           </a:p>
@@ -1516,7 +1517,7 @@
           <a:p>
             <a:fld id="{54625299-AB44-DC4F-8298-06AEFD226229}" type="datetime1">
               <a:rPr lang="en-US" smtClean="0"/>
-              <a:t>6/3/2026</a:t>
+              <a:t>6/7/2026</a:t>
             </a:fld>
             <a:endParaRPr lang="en-US"/>
           </a:p>
@@ -1781,7 +1782,7 @@
           <a:p>
             <a:fld id="{59648E9D-F6CC-0947-8760-9486F5A9BD4E}" type="datetime1">
               <a:rPr lang="en-US" smtClean="0"/>
-              <a:t>6/3/2026</a:t>
+              <a:t>6/7/2026</a:t>
             </a:fld>
             <a:endParaRPr lang="en-US"/>
           </a:p>
@@ -2193,7 +2194,7 @@
           <a:p>
             <a:fld id="{460F333D-DA02-4547-A559-BB43EA2A6211}" type="datetime1">
               <a:rPr lang="en-US" smtClean="0"/>
-              <a:t>6/3/2026</a:t>
+              <a:t>6/7/2026</a:t>
             </a:fld>
             <a:endParaRPr lang="en-US"/>
           </a:p>
@@ -2334,7 +2335,7 @@
           <a:p>
             <a:fld id="{A61B16AD-823D-A94C-BC2B-FA7915FA297C}" type="datetime1">
               <a:rPr lang="en-US" smtClean="0"/>
-              <a:t>6/3/2026</a:t>
+              <a:t>6/7/2026</a:t>
             </a:fld>
             <a:endParaRPr lang="en-US"/>
           </a:p>
@@ -2447,7 +2448,7 @@
           <a:p>
             <a:fld id="{6ABED333-79F5-664E-B69C-6AFCF3460939}" type="datetime1">
               <a:rPr lang="en-US" smtClean="0"/>
-              <a:t>6/3/2026</a:t>
+              <a:t>6/7/2026</a:t>
             </a:fld>
             <a:endParaRPr lang="en-US"/>
           </a:p>
@@ -2758,7 +2759,7 @@
           <a:p>
             <a:fld id="{73C8CB84-21D6-F747-9C42-BE8C3EF55772}" type="datetime1">
               <a:rPr lang="en-US" smtClean="0"/>
-              <a:t>6/3/2026</a:t>
+              <a:t>6/7/2026</a:t>
             </a:fld>
             <a:endParaRPr lang="en-US"/>
           </a:p>
@@ -3046,7 +3047,7 @@
           <a:p>
             <a:fld id="{1681E44B-1A20-0640-A37F-A9ED0485873B}" type="datetime1">
               <a:rPr lang="en-US" smtClean="0"/>
-              <a:t>6/3/2026</a:t>
+              <a:t>6/7/2026</a:t>
             </a:fld>
             <a:endParaRPr lang="en-US"/>
           </a:p>
@@ -3287,7 +3288,7 @@
           <a:p>
             <a:fld id="{1F4DD3BA-D26D-C744-B0E9-CB7B21E6F474}" type="datetime1">
               <a:rPr lang="en-US" smtClean="0"/>
-              <a:t>6/3/2026</a:t>
+              <a:t>6/7/2026</a:t>
             </a:fld>
             <a:endParaRPr lang="en-US"/>
           </a:p>
@@ -4289,6 +4290,181 @@
         <p:cNvPr id="1" name="">
           <a:extLst>
             <a:ext uri="{FF2B5EF4-FFF2-40B4-BE49-F238E27FC236}">
+              <a16:creationId xmlns:a16="http://schemas.microsoft.com/office/drawing/2014/main" id="{9A41A15B-52B3-F92A-0473-91F8747F38DE}"/>
+            </a:ext>
+          </a:extLst>
+        </p:cNvPr>
+        <p:cNvGrpSpPr/>
+        <p:nvPr/>
+      </p:nvGrpSpPr>
+      <p:grpSpPr>
+        <a:xfrm>
+          <a:off x="0" y="0"/>
+          <a:ext cx="0" cy="0"/>
+          <a:chOff x="0" y="0"/>
+          <a:chExt cx="0" cy="0"/>
+        </a:xfrm>
+      </p:grpSpPr>
+      <p:sp>
+        <p:nvSpPr>
+          <p:cNvPr id="2" name="Title 1">
+            <a:extLst>
+              <a:ext uri="{FF2B5EF4-FFF2-40B4-BE49-F238E27FC236}">
+                <a16:creationId xmlns:a16="http://schemas.microsoft.com/office/drawing/2014/main" id="{AB0DEBFA-F377-A3CB-17E5-6FFC4E4F5D66}"/>
+              </a:ext>
+            </a:extLst>
+          </p:cNvPr>
+          <p:cNvSpPr>
+            <a:spLocks noGrp="1"/>
+          </p:cNvSpPr>
+          <p:nvPr>
+            <p:ph type="title"/>
+          </p:nvPr>
+        </p:nvSpPr>
+        <p:spPr>
+          <a:xfrm>
+            <a:off x="838200" y="365125"/>
+            <a:ext cx="10515600" cy="861247"/>
+          </a:xfrm>
+        </p:spPr>
+        <p:txBody>
+          <a:bodyPr>
+            <a:normAutofit fontScale="90000"/>
+          </a:bodyPr>
+          <a:lstStyle/>
+          <a:p>
+            <a:r>
+              <a:rPr lang="ru-RU" b="1" dirty="0"/>
+              <a:t>Диаграмма последовательности</a:t>
+            </a:r>
+            <a:br>
+              <a:rPr lang="ru-RU" b="1" dirty="0"/>
+            </a:br>
+            <a:endParaRPr lang="en-US" sz="4000" b="1" dirty="0"/>
+          </a:p>
+        </p:txBody>
+      </p:sp>
+      <p:sp>
+        <p:nvSpPr>
+          <p:cNvPr id="6" name="Slide Number Placeholder 5">
+            <a:extLst>
+              <a:ext uri="{FF2B5EF4-FFF2-40B4-BE49-F238E27FC236}">
+                <a16:creationId xmlns:a16="http://schemas.microsoft.com/office/drawing/2014/main" id="{F6791905-94AD-FC8E-7A7C-F78C6F1CC62C}"/>
+              </a:ext>
+            </a:extLst>
+          </p:cNvPr>
+          <p:cNvSpPr>
+            <a:spLocks noGrp="1"/>
+          </p:cNvSpPr>
+          <p:nvPr>
+            <p:ph type="sldNum" sz="quarter" idx="12"/>
+          </p:nvPr>
+        </p:nvSpPr>
+        <p:spPr/>
+        <p:txBody>
+          <a:bodyPr/>
+          <a:lstStyle/>
+          <a:p>
+            <a:fld id="{E6EC051E-25F0-BE4E-9BA3-7274B3E06F68}" type="slidenum">
+              <a:rPr lang="en-US" smtClean="0">
+                <a:solidFill>
+                  <a:schemeClr val="tx1"/>
+                </a:solidFill>
+              </a:rPr>
+              <a:t>10</a:t>
+            </a:fld>
+            <a:endParaRPr lang="en-US" dirty="0">
+              <a:solidFill>
+                <a:schemeClr val="tx1"/>
+              </a:solidFill>
+            </a:endParaRPr>
+          </a:p>
+        </p:txBody>
+      </p:sp>
+      <p:graphicFrame>
+        <p:nvGraphicFramePr>
+          <p:cNvPr id="5" name="Объект 4">
+            <a:extLst>
+              <a:ext uri="{FF2B5EF4-FFF2-40B4-BE49-F238E27FC236}">
+                <a16:creationId xmlns:a16="http://schemas.microsoft.com/office/drawing/2014/main" id="{8ECE8BEE-FB8B-EA30-E7EF-7F199778EE3B}"/>
+              </a:ext>
+            </a:extLst>
+          </p:cNvPr>
+          <p:cNvGraphicFramePr>
+            <a:graphicFrameLocks noChangeAspect="1"/>
+          </p:cNvGraphicFramePr>
+          <p:nvPr>
+            <p:extLst>
+              <p:ext uri="{D42A27DB-BD31-4B8C-83A1-F6EECF244321}">
+                <p14:modId xmlns:p14="http://schemas.microsoft.com/office/powerpoint/2010/main" val="3711860769"/>
+              </p:ext>
+            </p:extLst>
+          </p:nvPr>
+        </p:nvGraphicFramePr>
+        <p:xfrm>
+          <a:off x="1147233" y="1289558"/>
+          <a:ext cx="9897533" cy="4618849"/>
+        </p:xfrm>
+        <a:graphic>
+          <a:graphicData uri="http://schemas.openxmlformats.org/presentationml/2006/ole">
+            <mc:AlternateContent xmlns:mc="http://schemas.openxmlformats.org/markup-compatibility/2006">
+              <mc:Choice xmlns:v="urn:schemas-microsoft-com:vml" Requires="v">
+                <p:oleObj name="Acrobat Document" r:id="rId2" imgW="6000685" imgH="2800080" progId="Acrobat.Document.DC">
+                  <p:embed/>
+                </p:oleObj>
+              </mc:Choice>
+              <mc:Fallback>
+                <p:oleObj name="Acrobat Document" r:id="rId2" imgW="6000685" imgH="2800080" progId="Acrobat.Document.DC">
+                  <p:embed/>
+                  <p:pic>
+                    <p:nvPicPr>
+                      <p:cNvPr id="0" name=""/>
+                      <p:cNvPicPr/>
+                      <p:nvPr/>
+                    </p:nvPicPr>
+                    <p:blipFill>
+                      <a:blip r:embed="rId3"/>
+                      <a:stretch>
+                        <a:fillRect/>
+                      </a:stretch>
+                    </p:blipFill>
+                    <p:spPr>
+                      <a:xfrm>
+                        <a:off x="1147233" y="1289558"/>
+                        <a:ext cx="9897533" cy="4618849"/>
+                      </a:xfrm>
+                      <a:prstGeom prst="rect">
+                        <a:avLst/>
+                      </a:prstGeom>
+                    </p:spPr>
+                  </p:pic>
+                </p:oleObj>
+              </mc:Fallback>
+            </mc:AlternateContent>
+          </a:graphicData>
+        </a:graphic>
+      </p:graphicFrame>
+    </p:spTree>
+    <p:extLst>
+      <p:ext uri="{BB962C8B-B14F-4D97-AF65-F5344CB8AC3E}">
+        <p14:creationId xmlns:p14="http://schemas.microsoft.com/office/powerpoint/2010/main" val="267264117"/>
+      </p:ext>
+    </p:extLst>
+  </p:cSld>
+  <p:clrMapOvr>
+    <a:masterClrMapping/>
+  </p:clrMapOvr>
+</p:sld>
+</file>
+
+<file path=ppt/slides/slide11.xml><?xml version="1.0" encoding="utf-8"?>
+<p:sld xmlns:a="http://schemas.openxmlformats.org/drawingml/2006/main" xmlns:r="http://schemas.openxmlformats.org/officeDocument/2006/relationships" xmlns:p="http://schemas.openxmlformats.org/presentationml/2006/main">
+  <p:cSld>
+    <p:spTree>
+      <p:nvGrpSpPr>
+        <p:cNvPr id="1" name="">
+          <a:extLst>
+            <a:ext uri="{FF2B5EF4-FFF2-40B4-BE49-F238E27FC236}">
               <a16:creationId xmlns:a16="http://schemas.microsoft.com/office/drawing/2014/main" id="{581E9BB3-FBEE-4A67-E2F5-41AAB0C83F1A}"/>
             </a:ext>
           </a:extLst>
@@ -4936,7 +5112,7 @@
                   <a:schemeClr val="tx1"/>
                 </a:solidFill>
               </a:rPr>
-              <a:t>10</a:t>
+              <a:t>11</a:t>
             </a:fld>
             <a:endParaRPr lang="en-US" dirty="0">
               <a:solidFill>
@@ -4959,7 +5135,7 @@
 </p:sld>
 </file>
 
-<file path=ppt/slides/slide11.xml><?xml version="1.0" encoding="utf-8"?>
+<file path=ppt/slides/slide12.xml><?xml version="1.0" encoding="utf-8"?>
 <p:sld xmlns:a="http://schemas.openxmlformats.org/drawingml/2006/main" xmlns:r="http://schemas.openxmlformats.org/officeDocument/2006/relationships" xmlns:p="http://schemas.openxmlformats.org/presentationml/2006/main">
   <p:cSld>
     <p:spTree>
@@ -5048,7 +5224,7 @@
                   <a:schemeClr val="tx1"/>
                 </a:solidFill>
               </a:rPr>
-              <a:t>11</a:t>
+              <a:t>12</a:t>
             </a:fld>
             <a:endParaRPr lang="en-US" dirty="0">
               <a:solidFill>
@@ -6011,7 +6187,7 @@
 </p:sld>
 </file>
 
-<file path=ppt/slides/slide12.xml><?xml version="1.0" encoding="utf-8"?>
+<file path=ppt/slides/slide13.xml><?xml version="1.0" encoding="utf-8"?>
 <p:sld xmlns:a="http://schemas.openxmlformats.org/drawingml/2006/main" xmlns:r="http://schemas.openxmlformats.org/officeDocument/2006/relationships" xmlns:p="http://schemas.openxmlformats.org/presentationml/2006/main">
   <p:cSld>
     <p:spTree>
@@ -6116,7 +6292,7 @@
                   <a:schemeClr val="tx1"/>
                 </a:solidFill>
               </a:rPr>
-              <a:t>12</a:t>
+              <a:t>13</a:t>
             </a:fld>
             <a:endParaRPr lang="en-US" dirty="0">
               <a:solidFill>
@@ -6168,7 +6344,7 @@
 </p:sld>
 </file>
 
-<file path=ppt/slides/slide13.xml><?xml version="1.0" encoding="utf-8"?>
+<file path=ppt/slides/slide14.xml><?xml version="1.0" encoding="utf-8"?>
 <p:sld xmlns:a="http://schemas.openxmlformats.org/drawingml/2006/main" xmlns:r="http://schemas.openxmlformats.org/officeDocument/2006/relationships" xmlns:p="http://schemas.openxmlformats.org/presentationml/2006/main">
   <p:cSld>
     <p:spTree>
@@ -6272,7 +6448,7 @@
                   <a:schemeClr val="tx1"/>
                 </a:solidFill>
               </a:rPr>
-              <a:t>13</a:t>
+              <a:t>14</a:t>
             </a:fld>
             <a:endParaRPr lang="en-US" dirty="0">
               <a:solidFill>
@@ -6324,7 +6500,7 @@
 </p:sld>
 </file>
 
-<file path=ppt/slides/slide14.xml><?xml version="1.0" encoding="utf-8"?>
+<file path=ppt/slides/slide15.xml><?xml version="1.0" encoding="utf-8"?>
 <p:sld xmlns:a="http://schemas.openxmlformats.org/drawingml/2006/main" xmlns:r="http://schemas.openxmlformats.org/officeDocument/2006/relationships" xmlns:p="http://schemas.openxmlformats.org/presentationml/2006/main">
   <p:cSld>
     <p:spTree>
@@ -6428,7 +6604,7 @@
                   <a:schemeClr val="tx1"/>
                 </a:solidFill>
               </a:rPr>
-              <a:t>14</a:t>
+              <a:t>15</a:t>
             </a:fld>
             <a:endParaRPr lang="en-US" dirty="0">
               <a:solidFill>
@@ -6480,7 +6656,7 @@
 </p:sld>
 </file>
 
-<file path=ppt/slides/slide15.xml><?xml version="1.0" encoding="utf-8"?>
+<file path=ppt/slides/slide16.xml><?xml version="1.0" encoding="utf-8"?>
 <p:sld xmlns:a="http://schemas.openxmlformats.org/drawingml/2006/main" xmlns:r="http://schemas.openxmlformats.org/officeDocument/2006/relationships" xmlns:p="http://schemas.openxmlformats.org/presentationml/2006/main">
   <p:cSld>
     <p:spTree>
@@ -6585,7 +6761,7 @@
                   <a:schemeClr val="tx1"/>
                 </a:solidFill>
               </a:rPr>
-              <a:t>15</a:t>
+              <a:t>16</a:t>
             </a:fld>
             <a:endParaRPr lang="en-US" dirty="0">
               <a:solidFill>
@@ -6959,7 +7135,7 @@
 </p:sld>
 </file>
 
-<file path=ppt/slides/slide16.xml><?xml version="1.0" encoding="utf-8"?>
+<file path=ppt/slides/slide17.xml><?xml version="1.0" encoding="utf-8"?>
 <p:sld xmlns:a="http://schemas.openxmlformats.org/drawingml/2006/main" xmlns:r="http://schemas.openxmlformats.org/officeDocument/2006/relationships" xmlns:p="http://schemas.openxmlformats.org/presentationml/2006/main">
   <p:cSld>
     <p:spTree>
@@ -7137,7 +7313,7 @@
                   <a:schemeClr val="tx1"/>
                 </a:solidFill>
               </a:rPr>
-              <a:t>16</a:t>
+              <a:t>17</a:t>
             </a:fld>
             <a:endParaRPr lang="en-US" dirty="0">
               <a:solidFill>
@@ -8570,6 +8746,144 @@
         <p:cNvPr id="1" name="">
           <a:extLst>
             <a:ext uri="{FF2B5EF4-FFF2-40B4-BE49-F238E27FC236}">
+              <a16:creationId xmlns:a16="http://schemas.microsoft.com/office/drawing/2014/main" id="{AF912508-5819-D882-0324-17B11F8A61A3}"/>
+            </a:ext>
+          </a:extLst>
+        </p:cNvPr>
+        <p:cNvGrpSpPr/>
+        <p:nvPr/>
+      </p:nvGrpSpPr>
+      <p:grpSpPr>
+        <a:xfrm>
+          <a:off x="0" y="0"/>
+          <a:ext cx="0" cy="0"/>
+          <a:chOff x="0" y="0"/>
+          <a:chExt cx="0" cy="0"/>
+        </a:xfrm>
+      </p:grpSpPr>
+      <p:sp>
+        <p:nvSpPr>
+          <p:cNvPr id="2" name="Title 1">
+            <a:extLst>
+              <a:ext uri="{FF2B5EF4-FFF2-40B4-BE49-F238E27FC236}">
+                <a16:creationId xmlns:a16="http://schemas.microsoft.com/office/drawing/2014/main" id="{CE404090-2D25-96C6-54C1-BB282D455D8C}"/>
+              </a:ext>
+            </a:extLst>
+          </p:cNvPr>
+          <p:cNvSpPr>
+            <a:spLocks noGrp="1"/>
+          </p:cNvSpPr>
+          <p:nvPr>
+            <p:ph type="title"/>
+          </p:nvPr>
+        </p:nvSpPr>
+        <p:spPr>
+          <a:xfrm>
+            <a:off x="838200" y="365125"/>
+            <a:ext cx="10515600" cy="861247"/>
+          </a:xfrm>
+        </p:spPr>
+        <p:txBody>
+          <a:bodyPr>
+            <a:normAutofit/>
+          </a:bodyPr>
+          <a:lstStyle/>
+          <a:p>
+            <a:r>
+              <a:rPr lang="ru-RU" b="1" dirty="0"/>
+              <a:t>Формализация задачи</a:t>
+            </a:r>
+          </a:p>
+        </p:txBody>
+      </p:sp>
+      <p:sp>
+        <p:nvSpPr>
+          <p:cNvPr id="10" name="Slide Number Placeholder 9">
+            <a:extLst>
+              <a:ext uri="{FF2B5EF4-FFF2-40B4-BE49-F238E27FC236}">
+                <a16:creationId xmlns:a16="http://schemas.microsoft.com/office/drawing/2014/main" id="{E8FBA160-F295-471D-3678-70B198E6B083}"/>
+              </a:ext>
+            </a:extLst>
+          </p:cNvPr>
+          <p:cNvSpPr>
+            <a:spLocks noGrp="1"/>
+          </p:cNvSpPr>
+          <p:nvPr>
+            <p:ph type="sldNum" sz="quarter" idx="12"/>
+          </p:nvPr>
+        </p:nvSpPr>
+        <p:spPr/>
+        <p:txBody>
+          <a:bodyPr/>
+          <a:lstStyle/>
+          <a:p>
+            <a:fld id="{E6EC051E-25F0-BE4E-9BA3-7274B3E06F68}" type="slidenum">
+              <a:rPr lang="en-US" smtClean="0">
+                <a:solidFill>
+                  <a:schemeClr val="tx1"/>
+                </a:solidFill>
+              </a:rPr>
+              <a:t>6</a:t>
+            </a:fld>
+            <a:endParaRPr lang="en-US" dirty="0">
+              <a:solidFill>
+                <a:schemeClr val="tx1"/>
+              </a:solidFill>
+            </a:endParaRPr>
+          </a:p>
+        </p:txBody>
+      </p:sp>
+      <p:pic>
+        <p:nvPicPr>
+          <p:cNvPr id="9" name="Рисунок 8">
+            <a:extLst>
+              <a:ext uri="{FF2B5EF4-FFF2-40B4-BE49-F238E27FC236}">
+                <a16:creationId xmlns:a16="http://schemas.microsoft.com/office/drawing/2014/main" id="{519F17E3-E02F-7397-DD84-5FB7D4EA565B}"/>
+              </a:ext>
+            </a:extLst>
+          </p:cNvPr>
+          <p:cNvPicPr>
+            <a:picLocks noChangeAspect="1"/>
+          </p:cNvPicPr>
+          <p:nvPr/>
+        </p:nvPicPr>
+        <p:blipFill>
+          <a:blip r:embed="rId2"/>
+          <a:stretch>
+            <a:fillRect/>
+          </a:stretch>
+        </p:blipFill>
+        <p:spPr>
+          <a:xfrm>
+            <a:off x="1481666" y="1226372"/>
+            <a:ext cx="9228667" cy="4633360"/>
+          </a:xfrm>
+          <a:prstGeom prst="rect">
+            <a:avLst/>
+          </a:prstGeom>
+        </p:spPr>
+      </p:pic>
+    </p:spTree>
+    <p:extLst>
+      <p:ext uri="{BB962C8B-B14F-4D97-AF65-F5344CB8AC3E}">
+        <p14:creationId xmlns:p14="http://schemas.microsoft.com/office/powerpoint/2010/main" val="2674346607"/>
+      </p:ext>
+    </p:extLst>
+  </p:cSld>
+  <p:clrMapOvr>
+    <a:masterClrMapping/>
+  </p:clrMapOvr>
+</p:sld>
+</file>
+
+<file path=ppt/slides/slide7.xml><?xml version="1.0" encoding="utf-8"?>
+<p:sld xmlns:a="http://schemas.openxmlformats.org/drawingml/2006/main" xmlns:r="http://schemas.openxmlformats.org/officeDocument/2006/relationships" xmlns:p="http://schemas.openxmlformats.org/presentationml/2006/main">
+  <p:cSld>
+    <p:spTree>
+      <p:nvGrpSpPr>
+        <p:cNvPr id="1" name="">
+          <a:extLst>
+            <a:ext uri="{FF2B5EF4-FFF2-40B4-BE49-F238E27FC236}">
               <a16:creationId xmlns:a16="http://schemas.microsoft.com/office/drawing/2014/main" id="{A80E56D2-CD83-F555-7083-EE54412A70CF}"/>
             </a:ext>
           </a:extLst>
@@ -8648,7 +8962,7 @@
                   <a:schemeClr val="tx1"/>
                 </a:solidFill>
               </a:rPr>
-              <a:t>6</a:t>
+              <a:t>7</a:t>
             </a:fld>
             <a:endParaRPr lang="en-US" dirty="0">
               <a:solidFill>
@@ -8658,69 +8972,36 @@
           </a:p>
         </p:txBody>
       </p:sp>
-      <p:graphicFrame>
-        <p:nvGraphicFramePr>
-          <p:cNvPr id="3" name="Объект 2">
-            <a:extLst>
-              <a:ext uri="{FF2B5EF4-FFF2-40B4-BE49-F238E27FC236}">
-                <a16:creationId xmlns:a16="http://schemas.microsoft.com/office/drawing/2014/main" id="{09903F68-8C3B-E93F-19CD-8337B2FBB536}"/>
-              </a:ext>
-            </a:extLst>
-          </p:cNvPr>
-          <p:cNvGraphicFramePr>
-            <a:graphicFrameLocks noChangeAspect="1"/>
-          </p:cNvGraphicFramePr>
-          <p:nvPr>
-            <p:extLst>
-              <p:ext uri="{D42A27DB-BD31-4B8C-83A1-F6EECF244321}">
-                <p14:modId xmlns:p14="http://schemas.microsoft.com/office/powerpoint/2010/main" val="2905095515"/>
-              </p:ext>
-            </p:extLst>
-          </p:nvPr>
-        </p:nvGraphicFramePr>
-        <p:xfrm>
-          <a:off x="2027502" y="1100387"/>
-          <a:ext cx="8136995" cy="5381949"/>
-        </p:xfrm>
-        <a:graphic>
-          <a:graphicData uri="http://schemas.openxmlformats.org/presentationml/2006/ole">
-            <mc:AlternateContent xmlns:mc="http://schemas.openxmlformats.org/markup-compatibility/2006">
-              <mc:Choice xmlns:v="urn:schemas-microsoft-com:vml" Requires="v">
-                <p:oleObj name="Acrobat Document" r:id="rId2" imgW="8467656" imgH="5600507" progId="Acrobat.Document.DC">
-                  <p:embed/>
-                </p:oleObj>
-              </mc:Choice>
-              <mc:Fallback>
-                <p:oleObj name="Acrobat Document" r:id="rId2" imgW="8467656" imgH="5600507" progId="Acrobat.Document.DC">
-                  <p:embed/>
-                  <p:pic>
-                    <p:nvPicPr>
-                      <p:cNvPr id="0" name=""/>
-                      <p:cNvPicPr/>
-                      <p:nvPr/>
-                    </p:nvPicPr>
-                    <p:blipFill>
-                      <a:blip r:embed="rId3"/>
-                      <a:stretch>
-                        <a:fillRect/>
-                      </a:stretch>
-                    </p:blipFill>
-                    <p:spPr>
-                      <a:xfrm>
-                        <a:off x="2027502" y="1100387"/>
-                        <a:ext cx="8136995" cy="5381949"/>
-                      </a:xfrm>
-                      <a:prstGeom prst="rect">
-                        <a:avLst/>
-                      </a:prstGeom>
-                    </p:spPr>
-                  </p:pic>
-                </p:oleObj>
-              </mc:Fallback>
-            </mc:AlternateContent>
-          </a:graphicData>
-        </a:graphic>
-      </p:graphicFrame>
+      <p:pic>
+        <p:nvPicPr>
+          <p:cNvPr id="6" name="Рисунок 5">
+            <a:extLst>
+              <a:ext uri="{FF2B5EF4-FFF2-40B4-BE49-F238E27FC236}">
+                <a16:creationId xmlns:a16="http://schemas.microsoft.com/office/drawing/2014/main" id="{0CB093C7-1916-A589-88E1-7C66DC98024E}"/>
+              </a:ext>
+            </a:extLst>
+          </p:cNvPr>
+          <p:cNvPicPr>
+            <a:picLocks noChangeAspect="1"/>
+          </p:cNvPicPr>
+          <p:nvPr/>
+        </p:nvPicPr>
+        <p:blipFill>
+          <a:blip r:embed="rId2"/>
+          <a:stretch>
+            <a:fillRect/>
+          </a:stretch>
+        </p:blipFill>
+        <p:spPr>
+          <a:xfrm>
+            <a:off x="3122620" y="1040412"/>
+            <a:ext cx="5946760" cy="5501898"/>
+          </a:xfrm>
+          <a:prstGeom prst="rect">
+            <a:avLst/>
+          </a:prstGeom>
+        </p:spPr>
+      </p:pic>
     </p:spTree>
     <p:extLst>
       <p:ext uri="{BB962C8B-B14F-4D97-AF65-F5344CB8AC3E}">
@@ -8734,7 +9015,7 @@
 </p:sld>
 </file>
 
-<file path=ppt/slides/slide7.xml><?xml version="1.0" encoding="utf-8"?>
+<file path=ppt/slides/slide8.xml><?xml version="1.0" encoding="utf-8"?>
 <p:sld xmlns:a="http://schemas.openxmlformats.org/drawingml/2006/main" xmlns:r="http://schemas.openxmlformats.org/officeDocument/2006/relationships" xmlns:p="http://schemas.openxmlformats.org/presentationml/2006/main">
   <p:cSld>
     <p:spTree>
@@ -8819,7 +9100,7 @@
                   <a:schemeClr val="tx1"/>
                 </a:solidFill>
               </a:rPr>
-              <a:t>7</a:t>
+              <a:t>8</a:t>
             </a:fld>
             <a:endParaRPr lang="en-US" dirty="0">
               <a:solidFill>
@@ -8872,7 +9153,7 @@
 </p:sld>
 </file>
 
-<file path=ppt/slides/slide8.xml><?xml version="1.0" encoding="utf-8"?>
+<file path=ppt/slides/slide9.xml><?xml version="1.0" encoding="utf-8"?>
 <p:sld xmlns:a="http://schemas.openxmlformats.org/drawingml/2006/main" xmlns:r="http://schemas.openxmlformats.org/officeDocument/2006/relationships" xmlns:p="http://schemas.openxmlformats.org/presentationml/2006/main">
   <p:cSld>
     <p:spTree>
@@ -8961,7 +9242,7 @@
                   <a:schemeClr val="tx1"/>
                 </a:solidFill>
               </a:rPr>
-              <a:t>8</a:t>
+              <a:t>9</a:t>
             </a:fld>
             <a:endParaRPr lang="en-US" dirty="0">
               <a:solidFill>
@@ -9005,181 +9286,6 @@
     <p:extLst>
       <p:ext uri="{BB962C8B-B14F-4D97-AF65-F5344CB8AC3E}">
         <p14:creationId xmlns:p14="http://schemas.microsoft.com/office/powerpoint/2010/main" val="1294725185"/>
-      </p:ext>
-    </p:extLst>
-  </p:cSld>
-  <p:clrMapOvr>
-    <a:masterClrMapping/>
-  </p:clrMapOvr>
-</p:sld>
-</file>
-
-<file path=ppt/slides/slide9.xml><?xml version="1.0" encoding="utf-8"?>
-<p:sld xmlns:a="http://schemas.openxmlformats.org/drawingml/2006/main" xmlns:r="http://schemas.openxmlformats.org/officeDocument/2006/relationships" xmlns:p="http://schemas.openxmlformats.org/presentationml/2006/main">
-  <p:cSld>
-    <p:spTree>
-      <p:nvGrpSpPr>
-        <p:cNvPr id="1" name="">
-          <a:extLst>
-            <a:ext uri="{FF2B5EF4-FFF2-40B4-BE49-F238E27FC236}">
-              <a16:creationId xmlns:a16="http://schemas.microsoft.com/office/drawing/2014/main" id="{9A41A15B-52B3-F92A-0473-91F8747F38DE}"/>
-            </a:ext>
-          </a:extLst>
-        </p:cNvPr>
-        <p:cNvGrpSpPr/>
-        <p:nvPr/>
-      </p:nvGrpSpPr>
-      <p:grpSpPr>
-        <a:xfrm>
-          <a:off x="0" y="0"/>
-          <a:ext cx="0" cy="0"/>
-          <a:chOff x="0" y="0"/>
-          <a:chExt cx="0" cy="0"/>
-        </a:xfrm>
-      </p:grpSpPr>
-      <p:sp>
-        <p:nvSpPr>
-          <p:cNvPr id="2" name="Title 1">
-            <a:extLst>
-              <a:ext uri="{FF2B5EF4-FFF2-40B4-BE49-F238E27FC236}">
-                <a16:creationId xmlns:a16="http://schemas.microsoft.com/office/drawing/2014/main" id="{AB0DEBFA-F377-A3CB-17E5-6FFC4E4F5D66}"/>
-              </a:ext>
-            </a:extLst>
-          </p:cNvPr>
-          <p:cNvSpPr>
-            <a:spLocks noGrp="1"/>
-          </p:cNvSpPr>
-          <p:nvPr>
-            <p:ph type="title"/>
-          </p:nvPr>
-        </p:nvSpPr>
-        <p:spPr>
-          <a:xfrm>
-            <a:off x="838200" y="365125"/>
-            <a:ext cx="10515600" cy="861247"/>
-          </a:xfrm>
-        </p:spPr>
-        <p:txBody>
-          <a:bodyPr>
-            <a:normAutofit fontScale="90000"/>
-          </a:bodyPr>
-          <a:lstStyle/>
-          <a:p>
-            <a:r>
-              <a:rPr lang="ru-RU" b="1" dirty="0"/>
-              <a:t>Диаграмма последовательности</a:t>
-            </a:r>
-            <a:br>
-              <a:rPr lang="ru-RU" b="1" dirty="0"/>
-            </a:br>
-            <a:endParaRPr lang="en-US" sz="4000" b="1" dirty="0"/>
-          </a:p>
-        </p:txBody>
-      </p:sp>
-      <p:sp>
-        <p:nvSpPr>
-          <p:cNvPr id="6" name="Slide Number Placeholder 5">
-            <a:extLst>
-              <a:ext uri="{FF2B5EF4-FFF2-40B4-BE49-F238E27FC236}">
-                <a16:creationId xmlns:a16="http://schemas.microsoft.com/office/drawing/2014/main" id="{F6791905-94AD-FC8E-7A7C-F78C6F1CC62C}"/>
-              </a:ext>
-            </a:extLst>
-          </p:cNvPr>
-          <p:cNvSpPr>
-            <a:spLocks noGrp="1"/>
-          </p:cNvSpPr>
-          <p:nvPr>
-            <p:ph type="sldNum" sz="quarter" idx="12"/>
-          </p:nvPr>
-        </p:nvSpPr>
-        <p:spPr/>
-        <p:txBody>
-          <a:bodyPr/>
-          <a:lstStyle/>
-          <a:p>
-            <a:fld id="{E6EC051E-25F0-BE4E-9BA3-7274B3E06F68}" type="slidenum">
-              <a:rPr lang="en-US" smtClean="0">
-                <a:solidFill>
-                  <a:schemeClr val="tx1"/>
-                </a:solidFill>
-              </a:rPr>
-              <a:t>9</a:t>
-            </a:fld>
-            <a:endParaRPr lang="en-US" dirty="0">
-              <a:solidFill>
-                <a:schemeClr val="tx1"/>
-              </a:solidFill>
-            </a:endParaRPr>
-          </a:p>
-        </p:txBody>
-      </p:sp>
-      <p:graphicFrame>
-        <p:nvGraphicFramePr>
-          <p:cNvPr id="5" name="Объект 4">
-            <a:extLst>
-              <a:ext uri="{FF2B5EF4-FFF2-40B4-BE49-F238E27FC236}">
-                <a16:creationId xmlns:a16="http://schemas.microsoft.com/office/drawing/2014/main" id="{8ECE8BEE-FB8B-EA30-E7EF-7F199778EE3B}"/>
-              </a:ext>
-            </a:extLst>
-          </p:cNvPr>
-          <p:cNvGraphicFramePr>
-            <a:graphicFrameLocks noChangeAspect="1"/>
-          </p:cNvGraphicFramePr>
-          <p:nvPr>
-            <p:extLst>
-              <p:ext uri="{D42A27DB-BD31-4B8C-83A1-F6EECF244321}">
-                <p14:modId xmlns:p14="http://schemas.microsoft.com/office/powerpoint/2010/main" val="3711860769"/>
-              </p:ext>
-            </p:extLst>
-          </p:nvPr>
-        </p:nvGraphicFramePr>
-        <p:xfrm>
-          <a:off x="1147233" y="1289558"/>
-          <a:ext cx="9897533" cy="4618849"/>
-        </p:xfrm>
-        <a:graphic>
-          <a:graphicData uri="http://schemas.openxmlformats.org/presentationml/2006/ole">
-            <mc:AlternateContent xmlns:mc="http://schemas.openxmlformats.org/markup-compatibility/2006">
-              <mc:Choice xmlns:v="urn:schemas-microsoft-com:vml" Requires="v">
-                <p:oleObj name="Acrobat Document" r:id="rId2" imgW="6000685" imgH="2800080" progId="Acrobat.Document.DC">
-                  <p:embed/>
-                </p:oleObj>
-              </mc:Choice>
-              <mc:Fallback>
-                <p:oleObj name="Acrobat Document" r:id="rId2" imgW="6000685" imgH="2800080" progId="Acrobat.Document.DC">
-                  <p:embed/>
-                  <p:pic>
-                    <p:nvPicPr>
-                      <p:cNvPr id="0" name=""/>
-                      <p:cNvPicPr/>
-                      <p:nvPr/>
-                    </p:nvPicPr>
-                    <p:blipFill>
-                      <a:blip r:embed="rId3"/>
-                      <a:stretch>
-                        <a:fillRect/>
-                      </a:stretch>
-                    </p:blipFill>
-                    <p:spPr>
-                      <a:xfrm>
-                        <a:off x="1147233" y="1289558"/>
-                        <a:ext cx="9897533" cy="4618849"/>
-                      </a:xfrm>
-                      <a:prstGeom prst="rect">
-                        <a:avLst/>
-                      </a:prstGeom>
-                    </p:spPr>
-                  </p:pic>
-                </p:oleObj>
-              </mc:Fallback>
-            </mc:AlternateContent>
-          </a:graphicData>
-        </a:graphic>
-      </p:graphicFrame>
-    </p:spTree>
-    <p:extLst>
-      <p:ext uri="{BB962C8B-B14F-4D97-AF65-F5344CB8AC3E}">
-        <p14:creationId xmlns:p14="http://schemas.microsoft.com/office/powerpoint/2010/main" val="267264117"/>
       </p:ext>
     </p:extLst>
   </p:cSld>

--- a/prez/prez.pptx
+++ b/prez/prez.pptx
@@ -11,9 +11,9 @@
     <p:sldId id="256" r:id="rId2"/>
     <p:sldId id="257" r:id="rId3"/>
     <p:sldId id="258" r:id="rId4"/>
-    <p:sldId id="259" r:id="rId5"/>
-    <p:sldId id="260" r:id="rId6"/>
-    <p:sldId id="276" r:id="rId7"/>
+    <p:sldId id="276" r:id="rId5"/>
+    <p:sldId id="259" r:id="rId6"/>
+    <p:sldId id="260" r:id="rId7"/>
     <p:sldId id="261" r:id="rId8"/>
     <p:sldId id="262" r:id="rId9"/>
     <p:sldId id="263" r:id="rId10"/>
@@ -224,7 +224,7 @@
           <a:p>
             <a:fld id="{9534C4FF-5296-F440-8A99-26742BCF3BE3}" type="datetimeFigureOut">
               <a:rPr lang="en-US" smtClean="0"/>
-              <a:t>6/7/2026</a:t>
+              <a:t>6/8/2026</a:t>
             </a:fld>
             <a:endParaRPr lang="en-US"/>
           </a:p>
@@ -638,7 +638,7 @@
           <a:p>
             <a:fld id="{B57C869F-F4EF-2944-906D-51151E3A4E1C}" type="datetime1">
               <a:rPr lang="en-US" smtClean="0"/>
-              <a:t>6/7/2026</a:t>
+              <a:t>6/8/2026</a:t>
             </a:fld>
             <a:endParaRPr lang="en-US"/>
           </a:p>
@@ -836,7 +836,7 @@
           <a:p>
             <a:fld id="{8D4D78EE-9966-5B4E-959F-86C895F1DFC7}" type="datetime1">
               <a:rPr lang="en-US" smtClean="0"/>
-              <a:t>6/7/2026</a:t>
+              <a:t>6/8/2026</a:t>
             </a:fld>
             <a:endParaRPr lang="en-US"/>
           </a:p>
@@ -1044,7 +1044,7 @@
           <a:p>
             <a:fld id="{1B938C08-9193-7C4F-8305-3D1CE11FCB84}" type="datetime1">
               <a:rPr lang="en-US" smtClean="0"/>
-              <a:t>6/7/2026</a:t>
+              <a:t>6/8/2026</a:t>
             </a:fld>
             <a:endParaRPr lang="en-US"/>
           </a:p>
@@ -1242,7 +1242,7 @@
           <a:p>
             <a:fld id="{71EFBE53-00DA-0441-9A7C-21012EABDCEB}" type="datetime1">
               <a:rPr lang="en-US" smtClean="0"/>
-              <a:t>6/7/2026</a:t>
+              <a:t>6/8/2026</a:t>
             </a:fld>
             <a:endParaRPr lang="en-US"/>
           </a:p>
@@ -1517,7 +1517,7 @@
           <a:p>
             <a:fld id="{54625299-AB44-DC4F-8298-06AEFD226229}" type="datetime1">
               <a:rPr lang="en-US" smtClean="0"/>
-              <a:t>6/7/2026</a:t>
+              <a:t>6/8/2026</a:t>
             </a:fld>
             <a:endParaRPr lang="en-US"/>
           </a:p>
@@ -1782,7 +1782,7 @@
           <a:p>
             <a:fld id="{59648E9D-F6CC-0947-8760-9486F5A9BD4E}" type="datetime1">
               <a:rPr lang="en-US" smtClean="0"/>
-              <a:t>6/7/2026</a:t>
+              <a:t>6/8/2026</a:t>
             </a:fld>
             <a:endParaRPr lang="en-US"/>
           </a:p>
@@ -2194,7 +2194,7 @@
           <a:p>
             <a:fld id="{460F333D-DA02-4547-A559-BB43EA2A6211}" type="datetime1">
               <a:rPr lang="en-US" smtClean="0"/>
-              <a:t>6/7/2026</a:t>
+              <a:t>6/8/2026</a:t>
             </a:fld>
             <a:endParaRPr lang="en-US"/>
           </a:p>
@@ -2335,7 +2335,7 @@
           <a:p>
             <a:fld id="{A61B16AD-823D-A94C-BC2B-FA7915FA297C}" type="datetime1">
               <a:rPr lang="en-US" smtClean="0"/>
-              <a:t>6/7/2026</a:t>
+              <a:t>6/8/2026</a:t>
             </a:fld>
             <a:endParaRPr lang="en-US"/>
           </a:p>
@@ -2448,7 +2448,7 @@
           <a:p>
             <a:fld id="{6ABED333-79F5-664E-B69C-6AFCF3460939}" type="datetime1">
               <a:rPr lang="en-US" smtClean="0"/>
-              <a:t>6/7/2026</a:t>
+              <a:t>6/8/2026</a:t>
             </a:fld>
             <a:endParaRPr lang="en-US"/>
           </a:p>
@@ -2759,7 +2759,7 @@
           <a:p>
             <a:fld id="{73C8CB84-21D6-F747-9C42-BE8C3EF55772}" type="datetime1">
               <a:rPr lang="en-US" smtClean="0"/>
-              <a:t>6/7/2026</a:t>
+              <a:t>6/8/2026</a:t>
             </a:fld>
             <a:endParaRPr lang="en-US"/>
           </a:p>
@@ -3047,7 +3047,7 @@
           <a:p>
             <a:fld id="{1681E44B-1A20-0640-A37F-A9ED0485873B}" type="datetime1">
               <a:rPr lang="en-US" smtClean="0"/>
-              <a:t>6/7/2026</a:t>
+              <a:t>6/8/2026</a:t>
             </a:fld>
             <a:endParaRPr lang="en-US"/>
           </a:p>
@@ -3288,7 +3288,7 @@
           <a:p>
             <a:fld id="{1F4DD3BA-D26D-C744-B0E9-CB7B21E6F474}" type="datetime1">
               <a:rPr lang="en-US" smtClean="0"/>
-              <a:t>6/7/2026</a:t>
+              <a:t>6/8/2026</a:t>
             </a:fld>
             <a:endParaRPr lang="en-US"/>
           </a:p>
@@ -4531,7 +4531,7 @@
           <p:nvPr>
             <p:extLst>
               <p:ext uri="{D42A27DB-BD31-4B8C-83A1-F6EECF244321}">
-                <p14:modId xmlns:p14="http://schemas.microsoft.com/office/powerpoint/2010/main" val="528208592"/>
+                <p14:modId xmlns:p14="http://schemas.microsoft.com/office/powerpoint/2010/main" val="3772761490"/>
               </p:ext>
             </p:extLst>
           </p:nvPr>
@@ -4613,7 +4613,13 @@
                       </a:endParaRPr>
                     </a:p>
                   </a:txBody>
-                  <a:tcPr anchor="ctr"/>
+                  <a:tcPr anchor="ctr">
+                    <a:solidFill>
+                      <a:schemeClr val="bg1">
+                        <a:lumMod val="65000"/>
+                      </a:schemeClr>
+                    </a:solidFill>
+                  </a:tcPr>
                 </a:tc>
                 <a:tc>
                   <a:txBody>
@@ -4696,7 +4702,13 @@
                       </a:endParaRPr>
                     </a:p>
                   </a:txBody>
-                  <a:tcPr anchor="ctr"/>
+                  <a:tcPr anchor="ctr">
+                    <a:solidFill>
+                      <a:schemeClr val="bg1">
+                        <a:lumMod val="65000"/>
+                      </a:schemeClr>
+                    </a:solidFill>
+                  </a:tcPr>
                 </a:tc>
                 <a:tc>
                   <a:txBody>
@@ -4779,7 +4791,13 @@
                       </a:endParaRPr>
                     </a:p>
                   </a:txBody>
-                  <a:tcPr anchor="ctr"/>
+                  <a:tcPr anchor="ctr">
+                    <a:solidFill>
+                      <a:schemeClr val="bg1">
+                        <a:lumMod val="65000"/>
+                      </a:schemeClr>
+                    </a:solidFill>
+                  </a:tcPr>
                 </a:tc>
                 <a:tc>
                   <a:txBody>
@@ -4854,7 +4872,7 @@
                         <a:buNone/>
                       </a:pPr>
                       <a:r>
-                        <a:rPr lang="ru-RU" sz="1600"/>
+                        <a:rPr lang="ru-RU" sz="1600" dirty="0"/>
                         <a:t>Да</a:t>
                       </a:r>
                       <a:endParaRPr lang="en-US" sz="1600" dirty="0">
@@ -4862,7 +4880,13 @@
                       </a:endParaRPr>
                     </a:p>
                   </a:txBody>
-                  <a:tcPr anchor="ctr"/>
+                  <a:tcPr anchor="ctr">
+                    <a:solidFill>
+                      <a:schemeClr val="bg1">
+                        <a:lumMod val="65000"/>
+                      </a:schemeClr>
+                    </a:solidFill>
+                  </a:tcPr>
                 </a:tc>
                 <a:tc>
                   <a:txBody>
@@ -4951,7 +4975,9 @@
                   </a:txBody>
                   <a:tcPr anchor="ctr">
                     <a:solidFill>
-                      <a:schemeClr val="bg1"/>
+                      <a:schemeClr val="bg1">
+                        <a:lumMod val="65000"/>
+                      </a:schemeClr>
                     </a:solidFill>
                   </a:tcPr>
                 </a:tc>
@@ -6304,19 +6330,17 @@
       </p:sp>
       <p:pic>
         <p:nvPicPr>
-          <p:cNvPr id="5" name="Объект 4">
-            <a:extLst>
-              <a:ext uri="{FF2B5EF4-FFF2-40B4-BE49-F238E27FC236}">
-                <a16:creationId xmlns:a16="http://schemas.microsoft.com/office/drawing/2014/main" id="{D579C346-0D54-8CF5-D162-01F7B861314B}"/>
+          <p:cNvPr id="8" name="Рисунок 7">
+            <a:extLst>
+              <a:ext uri="{FF2B5EF4-FFF2-40B4-BE49-F238E27FC236}">
+                <a16:creationId xmlns:a16="http://schemas.microsoft.com/office/drawing/2014/main" id="{4C3F027A-37D2-3153-49CF-52F0679FB973}"/>
               </a:ext>
             </a:extLst>
           </p:cNvPr>
           <p:cNvPicPr>
-            <a:picLocks noGrp="1" noChangeAspect="1"/>
+            <a:picLocks noChangeAspect="1"/>
           </p:cNvPicPr>
-          <p:nvPr>
-            <p:ph idx="1"/>
-          </p:nvPr>
+          <p:nvPr/>
         </p:nvPicPr>
         <p:blipFill>
           <a:blip r:embed="rId2"/>
@@ -6326,9 +6350,12 @@
         </p:blipFill>
         <p:spPr>
           <a:xfrm>
-            <a:off x="1198033" y="1226372"/>
-            <a:ext cx="9795934" cy="5118274"/>
+            <a:off x="1129604" y="1243305"/>
+            <a:ext cx="9932792" cy="5162983"/>
           </a:xfrm>
+          <a:prstGeom prst="rect">
+            <a:avLst/>
+          </a:prstGeom>
         </p:spPr>
       </p:pic>
     </p:spTree>
@@ -6482,11 +6509,222 @@
         </p:blipFill>
         <p:spPr>
           <a:xfrm>
-            <a:off x="2211125" y="1825625"/>
+            <a:off x="2211125" y="1050278"/>
             <a:ext cx="7769749" cy="4351338"/>
           </a:xfrm>
         </p:spPr>
       </p:pic>
+      <p:sp>
+        <p:nvSpPr>
+          <p:cNvPr id="6" name="Content Placeholder 2">
+            <a:extLst>
+              <a:ext uri="{FF2B5EF4-FFF2-40B4-BE49-F238E27FC236}">
+                <a16:creationId xmlns:a16="http://schemas.microsoft.com/office/drawing/2014/main" id="{FE537E5D-B36A-8FF1-43E0-26F6C25D19FD}"/>
+              </a:ext>
+            </a:extLst>
+          </p:cNvPr>
+          <p:cNvSpPr txBox="1">
+            <a:spLocks/>
+          </p:cNvSpPr>
+          <p:nvPr/>
+        </p:nvSpPr>
+        <p:spPr>
+          <a:xfrm>
+            <a:off x="1250875" y="5401616"/>
+            <a:ext cx="10941125" cy="1130829"/>
+          </a:xfrm>
+          <a:prstGeom prst="rect">
+            <a:avLst/>
+          </a:prstGeom>
+        </p:spPr>
+        <p:txBody>
+          <a:bodyPr vert="horz" lIns="91440" tIns="45720" rIns="91440" bIns="45720" rtlCol="0">
+            <a:noAutofit/>
+          </a:bodyPr>
+          <a:lstStyle>
+            <a:lvl1pPr marL="228600" indent="-228600" algn="l" defTabSz="914400" rtl="0" eaLnBrk="1" latinLnBrk="0" hangingPunct="1">
+              <a:lnSpc>
+                <a:spcPct val="90000"/>
+              </a:lnSpc>
+              <a:spcBef>
+                <a:spcPts val="1000"/>
+              </a:spcBef>
+              <a:buFont typeface="Arial" panose="020B0604020202020204" pitchFamily="34" charset="0"/>
+              <a:buChar char="•"/>
+              <a:defRPr sz="2800" kern="1200">
+                <a:solidFill>
+                  <a:schemeClr val="tx1"/>
+                </a:solidFill>
+                <a:latin typeface="+mn-lt"/>
+                <a:ea typeface="+mn-ea"/>
+                <a:cs typeface="+mn-cs"/>
+              </a:defRPr>
+            </a:lvl1pPr>
+            <a:lvl2pPr marL="685800" indent="-228600" algn="l" defTabSz="914400" rtl="0" eaLnBrk="1" latinLnBrk="0" hangingPunct="1">
+              <a:lnSpc>
+                <a:spcPct val="90000"/>
+              </a:lnSpc>
+              <a:spcBef>
+                <a:spcPts val="500"/>
+              </a:spcBef>
+              <a:buFont typeface="Arial" panose="020B0604020202020204" pitchFamily="34" charset="0"/>
+              <a:buChar char="•"/>
+              <a:defRPr sz="2400" kern="1200">
+                <a:solidFill>
+                  <a:schemeClr val="tx1"/>
+                </a:solidFill>
+                <a:latin typeface="+mn-lt"/>
+                <a:ea typeface="+mn-ea"/>
+                <a:cs typeface="+mn-cs"/>
+              </a:defRPr>
+            </a:lvl2pPr>
+            <a:lvl3pPr marL="1143000" indent="-228600" algn="l" defTabSz="914400" rtl="0" eaLnBrk="1" latinLnBrk="0" hangingPunct="1">
+              <a:lnSpc>
+                <a:spcPct val="90000"/>
+              </a:lnSpc>
+              <a:spcBef>
+                <a:spcPts val="500"/>
+              </a:spcBef>
+              <a:buFont typeface="Arial" panose="020B0604020202020204" pitchFamily="34" charset="0"/>
+              <a:buChar char="•"/>
+              <a:defRPr sz="2000" kern="1200">
+                <a:solidFill>
+                  <a:schemeClr val="tx1"/>
+                </a:solidFill>
+                <a:latin typeface="+mn-lt"/>
+                <a:ea typeface="+mn-ea"/>
+                <a:cs typeface="+mn-cs"/>
+              </a:defRPr>
+            </a:lvl3pPr>
+            <a:lvl4pPr marL="1600200" indent="-228600" algn="l" defTabSz="914400" rtl="0" eaLnBrk="1" latinLnBrk="0" hangingPunct="1">
+              <a:lnSpc>
+                <a:spcPct val="90000"/>
+              </a:lnSpc>
+              <a:spcBef>
+                <a:spcPts val="500"/>
+              </a:spcBef>
+              <a:buFont typeface="Arial" panose="020B0604020202020204" pitchFamily="34" charset="0"/>
+              <a:buChar char="•"/>
+              <a:defRPr sz="1800" kern="1200">
+                <a:solidFill>
+                  <a:schemeClr val="tx1"/>
+                </a:solidFill>
+                <a:latin typeface="+mn-lt"/>
+                <a:ea typeface="+mn-ea"/>
+                <a:cs typeface="+mn-cs"/>
+              </a:defRPr>
+            </a:lvl4pPr>
+            <a:lvl5pPr marL="2057400" indent="-228600" algn="l" defTabSz="914400" rtl="0" eaLnBrk="1" latinLnBrk="0" hangingPunct="1">
+              <a:lnSpc>
+                <a:spcPct val="90000"/>
+              </a:lnSpc>
+              <a:spcBef>
+                <a:spcPts val="500"/>
+              </a:spcBef>
+              <a:buFont typeface="Arial" panose="020B0604020202020204" pitchFamily="34" charset="0"/>
+              <a:buChar char="•"/>
+              <a:defRPr sz="1800" kern="1200">
+                <a:solidFill>
+                  <a:schemeClr val="tx1"/>
+                </a:solidFill>
+                <a:latin typeface="+mn-lt"/>
+                <a:ea typeface="+mn-ea"/>
+                <a:cs typeface="+mn-cs"/>
+              </a:defRPr>
+            </a:lvl5pPr>
+            <a:lvl6pPr marL="2514600" indent="-228600" algn="l" defTabSz="914400" rtl="0" eaLnBrk="1" latinLnBrk="0" hangingPunct="1">
+              <a:lnSpc>
+                <a:spcPct val="90000"/>
+              </a:lnSpc>
+              <a:spcBef>
+                <a:spcPts val="500"/>
+              </a:spcBef>
+              <a:buFont typeface="Arial" panose="020B0604020202020204" pitchFamily="34" charset="0"/>
+              <a:buChar char="•"/>
+              <a:defRPr sz="1800" kern="1200">
+                <a:solidFill>
+                  <a:schemeClr val="tx1"/>
+                </a:solidFill>
+                <a:latin typeface="+mn-lt"/>
+                <a:ea typeface="+mn-ea"/>
+                <a:cs typeface="+mn-cs"/>
+              </a:defRPr>
+            </a:lvl6pPr>
+            <a:lvl7pPr marL="2971800" indent="-228600" algn="l" defTabSz="914400" rtl="0" eaLnBrk="1" latinLnBrk="0" hangingPunct="1">
+              <a:lnSpc>
+                <a:spcPct val="90000"/>
+              </a:lnSpc>
+              <a:spcBef>
+                <a:spcPts val="500"/>
+              </a:spcBef>
+              <a:buFont typeface="Arial" panose="020B0604020202020204" pitchFamily="34" charset="0"/>
+              <a:buChar char="•"/>
+              <a:defRPr sz="1800" kern="1200">
+                <a:solidFill>
+                  <a:schemeClr val="tx1"/>
+                </a:solidFill>
+                <a:latin typeface="+mn-lt"/>
+                <a:ea typeface="+mn-ea"/>
+                <a:cs typeface="+mn-cs"/>
+              </a:defRPr>
+            </a:lvl7pPr>
+            <a:lvl8pPr marL="3429000" indent="-228600" algn="l" defTabSz="914400" rtl="0" eaLnBrk="1" latinLnBrk="0" hangingPunct="1">
+              <a:lnSpc>
+                <a:spcPct val="90000"/>
+              </a:lnSpc>
+              <a:spcBef>
+                <a:spcPts val="500"/>
+              </a:spcBef>
+              <a:buFont typeface="Arial" panose="020B0604020202020204" pitchFamily="34" charset="0"/>
+              <a:buChar char="•"/>
+              <a:defRPr sz="1800" kern="1200">
+                <a:solidFill>
+                  <a:schemeClr val="tx1"/>
+                </a:solidFill>
+                <a:latin typeface="+mn-lt"/>
+                <a:ea typeface="+mn-ea"/>
+                <a:cs typeface="+mn-cs"/>
+              </a:defRPr>
+            </a:lvl8pPr>
+            <a:lvl9pPr marL="3886200" indent="-228600" algn="l" defTabSz="914400" rtl="0" eaLnBrk="1" latinLnBrk="0" hangingPunct="1">
+              <a:lnSpc>
+                <a:spcPct val="90000"/>
+              </a:lnSpc>
+              <a:spcBef>
+                <a:spcPts val="500"/>
+              </a:spcBef>
+              <a:buFont typeface="Arial" panose="020B0604020202020204" pitchFamily="34" charset="0"/>
+              <a:buChar char="•"/>
+              <a:defRPr sz="1800" kern="1200">
+                <a:solidFill>
+                  <a:schemeClr val="tx1"/>
+                </a:solidFill>
+                <a:latin typeface="+mn-lt"/>
+                <a:ea typeface="+mn-ea"/>
+                <a:cs typeface="+mn-cs"/>
+              </a:defRPr>
+            </a:lvl9pPr>
+          </a:lstStyle>
+          <a:p>
+            <a:pPr marL="0" indent="0">
+              <a:buNone/>
+            </a:pPr>
+            <a:r>
+              <a:rPr lang="ru-RU" sz="2400" b="1" dirty="0"/>
+              <a:t>Вывод:</a:t>
+            </a:r>
+            <a:r>
+              <a:rPr lang="ru-RU" sz="2400" dirty="0"/>
+              <a:t> Использование предвычисленной витрины ускоряет выполнение аналитических запросов примерно в </a:t>
+            </a:r>
+            <a:r>
+              <a:rPr lang="ru-RU" sz="2400" b="1" dirty="0"/>
+              <a:t>31 раз</a:t>
+            </a:r>
+            <a:endParaRPr lang="ru-RU" sz="2400" dirty="0"/>
+          </a:p>
+        </p:txBody>
+      </p:sp>
     </p:spTree>
     <p:extLst>
       <p:ext uri="{BB962C8B-B14F-4D97-AF65-F5344CB8AC3E}">
@@ -6638,11 +6876,233 @@
         </p:blipFill>
         <p:spPr>
           <a:xfrm>
-            <a:off x="708685" y="1413933"/>
-            <a:ext cx="10774630" cy="4864630"/>
+            <a:off x="1061309" y="1044428"/>
+            <a:ext cx="10069382" cy="4546218"/>
           </a:xfrm>
         </p:spPr>
       </p:pic>
+      <p:sp>
+        <p:nvSpPr>
+          <p:cNvPr id="2" name="Content Placeholder 2">
+            <a:extLst>
+              <a:ext uri="{FF2B5EF4-FFF2-40B4-BE49-F238E27FC236}">
+                <a16:creationId xmlns:a16="http://schemas.microsoft.com/office/drawing/2014/main" id="{7DBCA122-1F87-08AA-B67C-367D9447C7EA}"/>
+              </a:ext>
+            </a:extLst>
+          </p:cNvPr>
+          <p:cNvSpPr txBox="1">
+            <a:spLocks/>
+          </p:cNvSpPr>
+          <p:nvPr/>
+        </p:nvSpPr>
+        <p:spPr>
+          <a:xfrm>
+            <a:off x="1250875" y="5590646"/>
+            <a:ext cx="10941125" cy="1130829"/>
+          </a:xfrm>
+          <a:prstGeom prst="rect">
+            <a:avLst/>
+          </a:prstGeom>
+        </p:spPr>
+        <p:txBody>
+          <a:bodyPr vert="horz" lIns="91440" tIns="45720" rIns="91440" bIns="45720" rtlCol="0">
+            <a:noAutofit/>
+          </a:bodyPr>
+          <a:lstStyle>
+            <a:lvl1pPr marL="228600" indent="-228600" algn="l" defTabSz="914400" rtl="0" eaLnBrk="1" latinLnBrk="0" hangingPunct="1">
+              <a:lnSpc>
+                <a:spcPct val="90000"/>
+              </a:lnSpc>
+              <a:spcBef>
+                <a:spcPts val="1000"/>
+              </a:spcBef>
+              <a:buFont typeface="Arial" panose="020B0604020202020204" pitchFamily="34" charset="0"/>
+              <a:buChar char="•"/>
+              <a:defRPr sz="2800" kern="1200">
+                <a:solidFill>
+                  <a:schemeClr val="tx1"/>
+                </a:solidFill>
+                <a:latin typeface="+mn-lt"/>
+                <a:ea typeface="+mn-ea"/>
+                <a:cs typeface="+mn-cs"/>
+              </a:defRPr>
+            </a:lvl1pPr>
+            <a:lvl2pPr marL="685800" indent="-228600" algn="l" defTabSz="914400" rtl="0" eaLnBrk="1" latinLnBrk="0" hangingPunct="1">
+              <a:lnSpc>
+                <a:spcPct val="90000"/>
+              </a:lnSpc>
+              <a:spcBef>
+                <a:spcPts val="500"/>
+              </a:spcBef>
+              <a:buFont typeface="Arial" panose="020B0604020202020204" pitchFamily="34" charset="0"/>
+              <a:buChar char="•"/>
+              <a:defRPr sz="2400" kern="1200">
+                <a:solidFill>
+                  <a:schemeClr val="tx1"/>
+                </a:solidFill>
+                <a:latin typeface="+mn-lt"/>
+                <a:ea typeface="+mn-ea"/>
+                <a:cs typeface="+mn-cs"/>
+              </a:defRPr>
+            </a:lvl2pPr>
+            <a:lvl3pPr marL="1143000" indent="-228600" algn="l" defTabSz="914400" rtl="0" eaLnBrk="1" latinLnBrk="0" hangingPunct="1">
+              <a:lnSpc>
+                <a:spcPct val="90000"/>
+              </a:lnSpc>
+              <a:spcBef>
+                <a:spcPts val="500"/>
+              </a:spcBef>
+              <a:buFont typeface="Arial" panose="020B0604020202020204" pitchFamily="34" charset="0"/>
+              <a:buChar char="•"/>
+              <a:defRPr sz="2000" kern="1200">
+                <a:solidFill>
+                  <a:schemeClr val="tx1"/>
+                </a:solidFill>
+                <a:latin typeface="+mn-lt"/>
+                <a:ea typeface="+mn-ea"/>
+                <a:cs typeface="+mn-cs"/>
+              </a:defRPr>
+            </a:lvl3pPr>
+            <a:lvl4pPr marL="1600200" indent="-228600" algn="l" defTabSz="914400" rtl="0" eaLnBrk="1" latinLnBrk="0" hangingPunct="1">
+              <a:lnSpc>
+                <a:spcPct val="90000"/>
+              </a:lnSpc>
+              <a:spcBef>
+                <a:spcPts val="500"/>
+              </a:spcBef>
+              <a:buFont typeface="Arial" panose="020B0604020202020204" pitchFamily="34" charset="0"/>
+              <a:buChar char="•"/>
+              <a:defRPr sz="1800" kern="1200">
+                <a:solidFill>
+                  <a:schemeClr val="tx1"/>
+                </a:solidFill>
+                <a:latin typeface="+mn-lt"/>
+                <a:ea typeface="+mn-ea"/>
+                <a:cs typeface="+mn-cs"/>
+              </a:defRPr>
+            </a:lvl4pPr>
+            <a:lvl5pPr marL="2057400" indent="-228600" algn="l" defTabSz="914400" rtl="0" eaLnBrk="1" latinLnBrk="0" hangingPunct="1">
+              <a:lnSpc>
+                <a:spcPct val="90000"/>
+              </a:lnSpc>
+              <a:spcBef>
+                <a:spcPts val="500"/>
+              </a:spcBef>
+              <a:buFont typeface="Arial" panose="020B0604020202020204" pitchFamily="34" charset="0"/>
+              <a:buChar char="•"/>
+              <a:defRPr sz="1800" kern="1200">
+                <a:solidFill>
+                  <a:schemeClr val="tx1"/>
+                </a:solidFill>
+                <a:latin typeface="+mn-lt"/>
+                <a:ea typeface="+mn-ea"/>
+                <a:cs typeface="+mn-cs"/>
+              </a:defRPr>
+            </a:lvl5pPr>
+            <a:lvl6pPr marL="2514600" indent="-228600" algn="l" defTabSz="914400" rtl="0" eaLnBrk="1" latinLnBrk="0" hangingPunct="1">
+              <a:lnSpc>
+                <a:spcPct val="90000"/>
+              </a:lnSpc>
+              <a:spcBef>
+                <a:spcPts val="500"/>
+              </a:spcBef>
+              <a:buFont typeface="Arial" panose="020B0604020202020204" pitchFamily="34" charset="0"/>
+              <a:buChar char="•"/>
+              <a:defRPr sz="1800" kern="1200">
+                <a:solidFill>
+                  <a:schemeClr val="tx1"/>
+                </a:solidFill>
+                <a:latin typeface="+mn-lt"/>
+                <a:ea typeface="+mn-ea"/>
+                <a:cs typeface="+mn-cs"/>
+              </a:defRPr>
+            </a:lvl6pPr>
+            <a:lvl7pPr marL="2971800" indent="-228600" algn="l" defTabSz="914400" rtl="0" eaLnBrk="1" latinLnBrk="0" hangingPunct="1">
+              <a:lnSpc>
+                <a:spcPct val="90000"/>
+              </a:lnSpc>
+              <a:spcBef>
+                <a:spcPts val="500"/>
+              </a:spcBef>
+              <a:buFont typeface="Arial" panose="020B0604020202020204" pitchFamily="34" charset="0"/>
+              <a:buChar char="•"/>
+              <a:defRPr sz="1800" kern="1200">
+                <a:solidFill>
+                  <a:schemeClr val="tx1"/>
+                </a:solidFill>
+                <a:latin typeface="+mn-lt"/>
+                <a:ea typeface="+mn-ea"/>
+                <a:cs typeface="+mn-cs"/>
+              </a:defRPr>
+            </a:lvl7pPr>
+            <a:lvl8pPr marL="3429000" indent="-228600" algn="l" defTabSz="914400" rtl="0" eaLnBrk="1" latinLnBrk="0" hangingPunct="1">
+              <a:lnSpc>
+                <a:spcPct val="90000"/>
+              </a:lnSpc>
+              <a:spcBef>
+                <a:spcPts val="500"/>
+              </a:spcBef>
+              <a:buFont typeface="Arial" panose="020B0604020202020204" pitchFamily="34" charset="0"/>
+              <a:buChar char="•"/>
+              <a:defRPr sz="1800" kern="1200">
+                <a:solidFill>
+                  <a:schemeClr val="tx1"/>
+                </a:solidFill>
+                <a:latin typeface="+mn-lt"/>
+                <a:ea typeface="+mn-ea"/>
+                <a:cs typeface="+mn-cs"/>
+              </a:defRPr>
+            </a:lvl8pPr>
+            <a:lvl9pPr marL="3886200" indent="-228600" algn="l" defTabSz="914400" rtl="0" eaLnBrk="1" latinLnBrk="0" hangingPunct="1">
+              <a:lnSpc>
+                <a:spcPct val="90000"/>
+              </a:lnSpc>
+              <a:spcBef>
+                <a:spcPts val="500"/>
+              </a:spcBef>
+              <a:buFont typeface="Arial" panose="020B0604020202020204" pitchFamily="34" charset="0"/>
+              <a:buChar char="•"/>
+              <a:defRPr sz="1800" kern="1200">
+                <a:solidFill>
+                  <a:schemeClr val="tx1"/>
+                </a:solidFill>
+                <a:latin typeface="+mn-lt"/>
+                <a:ea typeface="+mn-ea"/>
+                <a:cs typeface="+mn-cs"/>
+              </a:defRPr>
+            </a:lvl9pPr>
+          </a:lstStyle>
+          <a:p>
+            <a:pPr marL="0" indent="0">
+              <a:buNone/>
+            </a:pPr>
+            <a:r>
+              <a:rPr lang="ru-RU" sz="2400" b="1" dirty="0"/>
+              <a:t>Вывод:</a:t>
+            </a:r>
+            <a:r>
+              <a:rPr lang="ru-RU" sz="2400" dirty="0"/>
+              <a:t> Создание целевого B-</a:t>
+            </a:r>
+            <a:r>
+              <a:rPr lang="ru-RU" sz="2400" dirty="0" err="1"/>
+              <a:t>tree</a:t>
+            </a:r>
+            <a:r>
+              <a:rPr lang="ru-RU" sz="2400" dirty="0"/>
+              <a:t> индекса по столбцу фильтрации ускоряет селективную выборку в </a:t>
+            </a:r>
+            <a:r>
+              <a:rPr lang="ru-RU" sz="2400" b="1" dirty="0"/>
+              <a:t>5,3 раза</a:t>
+            </a:r>
+            <a:r>
+              <a:rPr lang="ru-RU" sz="2400" dirty="0"/>
+              <a:t>.</a:t>
+            </a:r>
+          </a:p>
+        </p:txBody>
+      </p:sp>
     </p:spTree>
     <p:extLst>
       <p:ext uri="{BB962C8B-B14F-4D97-AF65-F5344CB8AC3E}">
@@ -7114,7 +7574,7 @@
         </p:blipFill>
         <p:spPr>
           <a:xfrm>
-            <a:off x="2767509" y="1377860"/>
+            <a:off x="4823821" y="1335837"/>
             <a:ext cx="6656979" cy="3685208"/>
           </a:xfrm>
           <a:prstGeom prst="rect">
@@ -7122,6 +7582,244 @@
           </a:prstGeom>
         </p:spPr>
       </p:pic>
+      <p:sp>
+        <p:nvSpPr>
+          <p:cNvPr id="4" name="Content Placeholder 2">
+            <a:extLst>
+              <a:ext uri="{FF2B5EF4-FFF2-40B4-BE49-F238E27FC236}">
+                <a16:creationId xmlns:a16="http://schemas.microsoft.com/office/drawing/2014/main" id="{3509FE38-0837-105A-AAFA-F0D09C622B50}"/>
+              </a:ext>
+            </a:extLst>
+          </p:cNvPr>
+          <p:cNvSpPr txBox="1">
+            <a:spLocks/>
+          </p:cNvSpPr>
+          <p:nvPr/>
+        </p:nvSpPr>
+        <p:spPr>
+          <a:xfrm>
+            <a:off x="838199" y="1862956"/>
+            <a:ext cx="3606801" cy="2895310"/>
+          </a:xfrm>
+          <a:prstGeom prst="rect">
+            <a:avLst/>
+          </a:prstGeom>
+        </p:spPr>
+        <p:txBody>
+          <a:bodyPr vert="horz" lIns="91440" tIns="45720" rIns="91440" bIns="45720" rtlCol="0">
+            <a:noAutofit/>
+          </a:bodyPr>
+          <a:lstStyle>
+            <a:lvl1pPr marL="228600" indent="-228600" algn="l" defTabSz="914400" rtl="0" eaLnBrk="1" latinLnBrk="0" hangingPunct="1">
+              <a:lnSpc>
+                <a:spcPct val="90000"/>
+              </a:lnSpc>
+              <a:spcBef>
+                <a:spcPts val="1000"/>
+              </a:spcBef>
+              <a:buFont typeface="Arial" panose="020B0604020202020204" pitchFamily="34" charset="0"/>
+              <a:buChar char="•"/>
+              <a:defRPr sz="2800" kern="1200">
+                <a:solidFill>
+                  <a:schemeClr val="tx1"/>
+                </a:solidFill>
+                <a:latin typeface="+mn-lt"/>
+                <a:ea typeface="+mn-ea"/>
+                <a:cs typeface="+mn-cs"/>
+              </a:defRPr>
+            </a:lvl1pPr>
+            <a:lvl2pPr marL="685800" indent="-228600" algn="l" defTabSz="914400" rtl="0" eaLnBrk="1" latinLnBrk="0" hangingPunct="1">
+              <a:lnSpc>
+                <a:spcPct val="90000"/>
+              </a:lnSpc>
+              <a:spcBef>
+                <a:spcPts val="500"/>
+              </a:spcBef>
+              <a:buFont typeface="Arial" panose="020B0604020202020204" pitchFamily="34" charset="0"/>
+              <a:buChar char="•"/>
+              <a:defRPr sz="2400" kern="1200">
+                <a:solidFill>
+                  <a:schemeClr val="tx1"/>
+                </a:solidFill>
+                <a:latin typeface="+mn-lt"/>
+                <a:ea typeface="+mn-ea"/>
+                <a:cs typeface="+mn-cs"/>
+              </a:defRPr>
+            </a:lvl2pPr>
+            <a:lvl3pPr marL="1143000" indent="-228600" algn="l" defTabSz="914400" rtl="0" eaLnBrk="1" latinLnBrk="0" hangingPunct="1">
+              <a:lnSpc>
+                <a:spcPct val="90000"/>
+              </a:lnSpc>
+              <a:spcBef>
+                <a:spcPts val="500"/>
+              </a:spcBef>
+              <a:buFont typeface="Arial" panose="020B0604020202020204" pitchFamily="34" charset="0"/>
+              <a:buChar char="•"/>
+              <a:defRPr sz="2000" kern="1200">
+                <a:solidFill>
+                  <a:schemeClr val="tx1"/>
+                </a:solidFill>
+                <a:latin typeface="+mn-lt"/>
+                <a:ea typeface="+mn-ea"/>
+                <a:cs typeface="+mn-cs"/>
+              </a:defRPr>
+            </a:lvl3pPr>
+            <a:lvl4pPr marL="1600200" indent="-228600" algn="l" defTabSz="914400" rtl="0" eaLnBrk="1" latinLnBrk="0" hangingPunct="1">
+              <a:lnSpc>
+                <a:spcPct val="90000"/>
+              </a:lnSpc>
+              <a:spcBef>
+                <a:spcPts val="500"/>
+              </a:spcBef>
+              <a:buFont typeface="Arial" panose="020B0604020202020204" pitchFamily="34" charset="0"/>
+              <a:buChar char="•"/>
+              <a:defRPr sz="1800" kern="1200">
+                <a:solidFill>
+                  <a:schemeClr val="tx1"/>
+                </a:solidFill>
+                <a:latin typeface="+mn-lt"/>
+                <a:ea typeface="+mn-ea"/>
+                <a:cs typeface="+mn-cs"/>
+              </a:defRPr>
+            </a:lvl4pPr>
+            <a:lvl5pPr marL="2057400" indent="-228600" algn="l" defTabSz="914400" rtl="0" eaLnBrk="1" latinLnBrk="0" hangingPunct="1">
+              <a:lnSpc>
+                <a:spcPct val="90000"/>
+              </a:lnSpc>
+              <a:spcBef>
+                <a:spcPts val="500"/>
+              </a:spcBef>
+              <a:buFont typeface="Arial" panose="020B0604020202020204" pitchFamily="34" charset="0"/>
+              <a:buChar char="•"/>
+              <a:defRPr sz="1800" kern="1200">
+                <a:solidFill>
+                  <a:schemeClr val="tx1"/>
+                </a:solidFill>
+                <a:latin typeface="+mn-lt"/>
+                <a:ea typeface="+mn-ea"/>
+                <a:cs typeface="+mn-cs"/>
+              </a:defRPr>
+            </a:lvl5pPr>
+            <a:lvl6pPr marL="2514600" indent="-228600" algn="l" defTabSz="914400" rtl="0" eaLnBrk="1" latinLnBrk="0" hangingPunct="1">
+              <a:lnSpc>
+                <a:spcPct val="90000"/>
+              </a:lnSpc>
+              <a:spcBef>
+                <a:spcPts val="500"/>
+              </a:spcBef>
+              <a:buFont typeface="Arial" panose="020B0604020202020204" pitchFamily="34" charset="0"/>
+              <a:buChar char="•"/>
+              <a:defRPr sz="1800" kern="1200">
+                <a:solidFill>
+                  <a:schemeClr val="tx1"/>
+                </a:solidFill>
+                <a:latin typeface="+mn-lt"/>
+                <a:ea typeface="+mn-ea"/>
+                <a:cs typeface="+mn-cs"/>
+              </a:defRPr>
+            </a:lvl6pPr>
+            <a:lvl7pPr marL="2971800" indent="-228600" algn="l" defTabSz="914400" rtl="0" eaLnBrk="1" latinLnBrk="0" hangingPunct="1">
+              <a:lnSpc>
+                <a:spcPct val="90000"/>
+              </a:lnSpc>
+              <a:spcBef>
+                <a:spcPts val="500"/>
+              </a:spcBef>
+              <a:buFont typeface="Arial" panose="020B0604020202020204" pitchFamily="34" charset="0"/>
+              <a:buChar char="•"/>
+              <a:defRPr sz="1800" kern="1200">
+                <a:solidFill>
+                  <a:schemeClr val="tx1"/>
+                </a:solidFill>
+                <a:latin typeface="+mn-lt"/>
+                <a:ea typeface="+mn-ea"/>
+                <a:cs typeface="+mn-cs"/>
+              </a:defRPr>
+            </a:lvl7pPr>
+            <a:lvl8pPr marL="3429000" indent="-228600" algn="l" defTabSz="914400" rtl="0" eaLnBrk="1" latinLnBrk="0" hangingPunct="1">
+              <a:lnSpc>
+                <a:spcPct val="90000"/>
+              </a:lnSpc>
+              <a:spcBef>
+                <a:spcPts val="500"/>
+              </a:spcBef>
+              <a:buFont typeface="Arial" panose="020B0604020202020204" pitchFamily="34" charset="0"/>
+              <a:buChar char="•"/>
+              <a:defRPr sz="1800" kern="1200">
+                <a:solidFill>
+                  <a:schemeClr val="tx1"/>
+                </a:solidFill>
+                <a:latin typeface="+mn-lt"/>
+                <a:ea typeface="+mn-ea"/>
+                <a:cs typeface="+mn-cs"/>
+              </a:defRPr>
+            </a:lvl8pPr>
+            <a:lvl9pPr marL="3886200" indent="-228600" algn="l" defTabSz="914400" rtl="0" eaLnBrk="1" latinLnBrk="0" hangingPunct="1">
+              <a:lnSpc>
+                <a:spcPct val="90000"/>
+              </a:lnSpc>
+              <a:spcBef>
+                <a:spcPts val="500"/>
+              </a:spcBef>
+              <a:buFont typeface="Arial" panose="020B0604020202020204" pitchFamily="34" charset="0"/>
+              <a:buChar char="•"/>
+              <a:defRPr sz="1800" kern="1200">
+                <a:solidFill>
+                  <a:schemeClr val="tx1"/>
+                </a:solidFill>
+                <a:latin typeface="+mn-lt"/>
+                <a:ea typeface="+mn-ea"/>
+                <a:cs typeface="+mn-cs"/>
+              </a:defRPr>
+            </a:lvl9pPr>
+          </a:lstStyle>
+          <a:p>
+            <a:pPr marL="0" indent="0">
+              <a:buNone/>
+            </a:pPr>
+            <a:r>
+              <a:rPr lang="ru-RU" sz="2400" b="1" dirty="0"/>
+              <a:t>Вывод:</a:t>
+            </a:r>
+            <a:r>
+              <a:rPr lang="ru-RU" sz="2400" dirty="0"/>
+              <a:t> In-</a:t>
+            </a:r>
+            <a:r>
+              <a:rPr lang="ru-RU" sz="2400" dirty="0" err="1"/>
+              <a:t>memory</a:t>
+            </a:r>
+            <a:r>
+              <a:rPr lang="ru-RU" sz="2400" dirty="0"/>
+              <a:t> кэширование (</a:t>
+            </a:r>
+            <a:r>
+              <a:rPr lang="ru-RU" sz="2400" dirty="0" err="1"/>
+              <a:t>Redis</a:t>
+            </a:r>
+            <a:r>
+              <a:rPr lang="ru-RU" sz="2400" dirty="0"/>
+              <a:t>) снижает время ответа API в </a:t>
+            </a:r>
+            <a:r>
+              <a:rPr lang="ru-RU" sz="2400" b="1" dirty="0"/>
+              <a:t>3,2 раза</a:t>
+            </a:r>
+            <a:r>
+              <a:rPr lang="ru-RU" sz="2400" dirty="0"/>
+              <a:t>. Система выдерживает до </a:t>
+            </a:r>
+            <a:r>
+              <a:rPr lang="ru-RU" sz="2400" b="1" dirty="0"/>
+              <a:t>10 одновременных запросов</a:t>
+            </a:r>
+            <a:r>
+              <a:rPr lang="ru-RU" sz="2400" dirty="0"/>
+              <a:t> без превышения порога в 100 мс.</a:t>
+            </a:r>
+          </a:p>
+        </p:txBody>
+      </p:sp>
     </p:spTree>
     <p:extLst>
       <p:ext uri="{BB962C8B-B14F-4D97-AF65-F5344CB8AC3E}">
@@ -7218,7 +7916,7 @@
         </p:spPr>
         <p:txBody>
           <a:bodyPr>
-            <a:normAutofit/>
+            <a:noAutofit/>
           </a:bodyPr>
           <a:lstStyle/>
           <a:p>
@@ -7233,27 +7931,31 @@
           <a:p>
             <a:r>
               <a:rPr lang="ru-RU" sz="2400" dirty="0"/>
-              <a:t>Спроектирована и нормализована реляционная база данных для спортивной аналитики (159 тыс. фактов).</a:t>
+              <a:t>Проведен анализ предметной области и существующих систем спортивной статистики.</a:t>
             </a:r>
           </a:p>
           <a:p>
             <a:r>
               <a:rPr lang="ru-RU" sz="2400" dirty="0"/>
-              <a:t>На уровне СУБД реализованы математические алгоритмы расчета 5 комплексных метрик (PER, BPM и др.) и проверки целостности.</a:t>
+              <a:t>Выделены 8 основных сущностей и описана ролевая модель</a:t>
             </a:r>
           </a:p>
           <a:p>
             <a:r>
               <a:rPr lang="ru-RU" sz="2400" dirty="0"/>
-              <a:t>Разработано REST API приложение с ролевым доступом и In-</a:t>
-            </a:r>
-            <a:r>
-              <a:rPr lang="ru-RU" sz="2400" dirty="0" err="1"/>
-              <a:t>memory</a:t>
-            </a:r>
+              <a:t>Спроектирована структура базы данных: созданы таблицы индексы, ограничения целостности и триггеры.</a:t>
+            </a:r>
+          </a:p>
+          <a:p>
             <a:r>
               <a:rPr lang="ru-RU" sz="2400" dirty="0"/>
-              <a:t> кэшированием (</a:t>
+              <a:t>Спроектированы и реализованы алгоритмы вычисления спортивных метрик на уровне СУБД.</a:t>
+            </a:r>
+          </a:p>
+          <a:p>
+            <a:r>
+              <a:rPr lang="ru-RU" sz="2400" dirty="0"/>
+              <a:t>Разработано программное обеспечение (REST API приложение) и механизм кэширования (</a:t>
             </a:r>
             <a:r>
               <a:rPr lang="ru-RU" sz="2400" dirty="0" err="1"/>
@@ -7267,21 +7969,7 @@
           <a:p>
             <a:r>
               <a:rPr lang="ru-RU" sz="2400" dirty="0"/>
-              <a:t>Доказана эффективность использования предвычисленных витрин (ускорение в 31 раз) и целевых B-</a:t>
-            </a:r>
-            <a:r>
-              <a:rPr lang="ru-RU" sz="2400" dirty="0" err="1"/>
-              <a:t>tree</a:t>
-            </a:r>
-            <a:r>
-              <a:rPr lang="ru-RU" sz="2400" dirty="0"/>
-              <a:t> индексов.</a:t>
-            </a:r>
-          </a:p>
-          <a:p>
-            <a:r>
-              <a:rPr lang="ru-RU" sz="2400" dirty="0"/>
-              <a:t>Готовый программный комплекс применим для внутреннего использования аналитическими отделами баскетбольных клубов.</a:t>
+              <a:t>Проведено исследование производительности, подтвердившее эффективность предвычисленных витрин, индексов и кэша при заданных объемах данных и нагрузке.</a:t>
             </a:r>
           </a:p>
         </p:txBody>
@@ -7616,7 +8304,7 @@
           <p:nvPr>
             <p:extLst>
               <p:ext uri="{D42A27DB-BD31-4B8C-83A1-F6EECF244321}">
-                <p14:modId xmlns:p14="http://schemas.microsoft.com/office/powerpoint/2010/main" val="2141743566"/>
+                <p14:modId xmlns:p14="http://schemas.microsoft.com/office/powerpoint/2010/main" val="1341245317"/>
               </p:ext>
             </p:extLst>
           </p:nvPr>
@@ -8033,7 +8721,13 @@
                       </a:endParaRPr>
                     </a:p>
                   </a:txBody>
-                  <a:tcPr anchor="ctr"/>
+                  <a:tcPr anchor="ctr">
+                    <a:solidFill>
+                      <a:schemeClr val="bg1">
+                        <a:lumMod val="75000"/>
+                      </a:schemeClr>
+                    </a:solidFill>
+                  </a:tcPr>
                 </a:tc>
                 <a:tc>
                   <a:txBody>
@@ -8058,7 +8752,13 @@
                       </a:endParaRPr>
                     </a:p>
                   </a:txBody>
-                  <a:tcPr anchor="ctr"/>
+                  <a:tcPr anchor="ctr">
+                    <a:solidFill>
+                      <a:schemeClr val="bg1">
+                        <a:lumMod val="75000"/>
+                      </a:schemeClr>
+                    </a:solidFill>
+                  </a:tcPr>
                 </a:tc>
                 <a:tc>
                   <a:txBody>
@@ -8083,7 +8783,13 @@
                       </a:endParaRPr>
                     </a:p>
                   </a:txBody>
-                  <a:tcPr anchor="ctr"/>
+                  <a:tcPr anchor="ctr">
+                    <a:solidFill>
+                      <a:schemeClr val="bg1">
+                        <a:lumMod val="75000"/>
+                      </a:schemeClr>
+                    </a:solidFill>
+                  </a:tcPr>
                 </a:tc>
                 <a:tc>
                   <a:txBody>
@@ -8102,7 +8808,13 @@
                       </a:endParaRPr>
                     </a:p>
                   </a:txBody>
-                  <a:tcPr anchor="ctr"/>
+                  <a:tcPr anchor="ctr">
+                    <a:solidFill>
+                      <a:schemeClr val="bg1">
+                        <a:lumMod val="75000"/>
+                      </a:schemeClr>
+                    </a:solidFill>
+                  </a:tcPr>
                 </a:tc>
                 <a:extLst>
                   <a:ext uri="{0D108BD9-81ED-4DB2-BD59-A6C34878D82A}">
@@ -8223,7 +8935,13 @@
                       </a:endParaRPr>
                     </a:p>
                   </a:txBody>
-                  <a:tcPr anchor="ctr"/>
+                  <a:tcPr anchor="ctr">
+                    <a:solidFill>
+                      <a:schemeClr val="bg1">
+                        <a:lumMod val="75000"/>
+                      </a:schemeClr>
+                    </a:solidFill>
+                  </a:tcPr>
                 </a:tc>
                 <a:tc>
                   <a:txBody>
@@ -8248,7 +8966,13 @@
                       </a:endParaRPr>
                     </a:p>
                   </a:txBody>
-                  <a:tcPr anchor="ctr"/>
+                  <a:tcPr anchor="ctr">
+                    <a:solidFill>
+                      <a:schemeClr val="bg1">
+                        <a:lumMod val="75000"/>
+                      </a:schemeClr>
+                    </a:solidFill>
+                  </a:tcPr>
                 </a:tc>
                 <a:tc>
                   <a:txBody>
@@ -8273,7 +8997,13 @@
                       </a:endParaRPr>
                     </a:p>
                   </a:txBody>
-                  <a:tcPr anchor="ctr"/>
+                  <a:tcPr anchor="ctr">
+                    <a:solidFill>
+                      <a:schemeClr val="bg1">
+                        <a:lumMod val="75000"/>
+                      </a:schemeClr>
+                    </a:solidFill>
+                  </a:tcPr>
                 </a:tc>
                 <a:tc>
                   <a:txBody>
@@ -8298,7 +9028,13 @@
                       </a:endParaRPr>
                     </a:p>
                   </a:txBody>
-                  <a:tcPr anchor="ctr"/>
+                  <a:tcPr anchor="ctr">
+                    <a:solidFill>
+                      <a:schemeClr val="bg1">
+                        <a:lumMod val="75000"/>
+                      </a:schemeClr>
+                    </a:solidFill>
+                  </a:tcPr>
                 </a:tc>
                 <a:extLst>
                   <a:ext uri="{0D108BD9-81ED-4DB2-BD59-A6C34878D82A}">
@@ -8462,6 +9198,144 @@
 </file>
 
 <file path=ppt/slides/slide4.xml><?xml version="1.0" encoding="utf-8"?>
+<p:sld xmlns:a="http://schemas.openxmlformats.org/drawingml/2006/main" xmlns:r="http://schemas.openxmlformats.org/officeDocument/2006/relationships" xmlns:p="http://schemas.openxmlformats.org/presentationml/2006/main">
+  <p:cSld>
+    <p:spTree>
+      <p:nvGrpSpPr>
+        <p:cNvPr id="1" name="">
+          <a:extLst>
+            <a:ext uri="{FF2B5EF4-FFF2-40B4-BE49-F238E27FC236}">
+              <a16:creationId xmlns:a16="http://schemas.microsoft.com/office/drawing/2014/main" id="{AF912508-5819-D882-0324-17B11F8A61A3}"/>
+            </a:ext>
+          </a:extLst>
+        </p:cNvPr>
+        <p:cNvGrpSpPr/>
+        <p:nvPr/>
+      </p:nvGrpSpPr>
+      <p:grpSpPr>
+        <a:xfrm>
+          <a:off x="0" y="0"/>
+          <a:ext cx="0" cy="0"/>
+          <a:chOff x="0" y="0"/>
+          <a:chExt cx="0" cy="0"/>
+        </a:xfrm>
+      </p:grpSpPr>
+      <p:sp>
+        <p:nvSpPr>
+          <p:cNvPr id="2" name="Title 1">
+            <a:extLst>
+              <a:ext uri="{FF2B5EF4-FFF2-40B4-BE49-F238E27FC236}">
+                <a16:creationId xmlns:a16="http://schemas.microsoft.com/office/drawing/2014/main" id="{CE404090-2D25-96C6-54C1-BB282D455D8C}"/>
+              </a:ext>
+            </a:extLst>
+          </p:cNvPr>
+          <p:cNvSpPr>
+            <a:spLocks noGrp="1"/>
+          </p:cNvSpPr>
+          <p:nvPr>
+            <p:ph type="title"/>
+          </p:nvPr>
+        </p:nvSpPr>
+        <p:spPr>
+          <a:xfrm>
+            <a:off x="838200" y="365125"/>
+            <a:ext cx="10515600" cy="861247"/>
+          </a:xfrm>
+        </p:spPr>
+        <p:txBody>
+          <a:bodyPr>
+            <a:normAutofit/>
+          </a:bodyPr>
+          <a:lstStyle/>
+          <a:p>
+            <a:r>
+              <a:rPr lang="ru-RU" b="1" dirty="0"/>
+              <a:t>Формализация задачи</a:t>
+            </a:r>
+          </a:p>
+        </p:txBody>
+      </p:sp>
+      <p:sp>
+        <p:nvSpPr>
+          <p:cNvPr id="10" name="Slide Number Placeholder 9">
+            <a:extLst>
+              <a:ext uri="{FF2B5EF4-FFF2-40B4-BE49-F238E27FC236}">
+                <a16:creationId xmlns:a16="http://schemas.microsoft.com/office/drawing/2014/main" id="{E8FBA160-F295-471D-3678-70B198E6B083}"/>
+              </a:ext>
+            </a:extLst>
+          </p:cNvPr>
+          <p:cNvSpPr>
+            <a:spLocks noGrp="1"/>
+          </p:cNvSpPr>
+          <p:nvPr>
+            <p:ph type="sldNum" sz="quarter" idx="12"/>
+          </p:nvPr>
+        </p:nvSpPr>
+        <p:spPr/>
+        <p:txBody>
+          <a:bodyPr/>
+          <a:lstStyle/>
+          <a:p>
+            <a:fld id="{E6EC051E-25F0-BE4E-9BA3-7274B3E06F68}" type="slidenum">
+              <a:rPr lang="en-US" smtClean="0">
+                <a:solidFill>
+                  <a:schemeClr val="tx1"/>
+                </a:solidFill>
+              </a:rPr>
+              <a:t>4</a:t>
+            </a:fld>
+            <a:endParaRPr lang="en-US" dirty="0">
+              <a:solidFill>
+                <a:schemeClr val="tx1"/>
+              </a:solidFill>
+            </a:endParaRPr>
+          </a:p>
+        </p:txBody>
+      </p:sp>
+      <p:pic>
+        <p:nvPicPr>
+          <p:cNvPr id="6" name="Рисунок 5">
+            <a:extLst>
+              <a:ext uri="{FF2B5EF4-FFF2-40B4-BE49-F238E27FC236}">
+                <a16:creationId xmlns:a16="http://schemas.microsoft.com/office/drawing/2014/main" id="{86E27E93-AC08-F5CE-BB1D-CF52864222A3}"/>
+              </a:ext>
+            </a:extLst>
+          </p:cNvPr>
+          <p:cNvPicPr>
+            <a:picLocks noChangeAspect="1"/>
+          </p:cNvPicPr>
+          <p:nvPr/>
+        </p:nvPicPr>
+        <p:blipFill>
+          <a:blip r:embed="rId2"/>
+          <a:stretch>
+            <a:fillRect/>
+          </a:stretch>
+        </p:blipFill>
+        <p:spPr>
+          <a:xfrm>
+            <a:off x="1239314" y="1226372"/>
+            <a:ext cx="9713371" cy="4876711"/>
+          </a:xfrm>
+          <a:prstGeom prst="rect">
+            <a:avLst/>
+          </a:prstGeom>
+        </p:spPr>
+      </p:pic>
+    </p:spTree>
+    <p:extLst>
+      <p:ext uri="{BB962C8B-B14F-4D97-AF65-F5344CB8AC3E}">
+        <p14:creationId xmlns:p14="http://schemas.microsoft.com/office/powerpoint/2010/main" val="2674346607"/>
+      </p:ext>
+    </p:extLst>
+  </p:cSld>
+  <p:clrMapOvr>
+    <a:masterClrMapping/>
+  </p:clrMapOvr>
+</p:sld>
+</file>
+
+<file path=ppt/slides/slide5.xml><?xml version="1.0" encoding="utf-8"?>
 <p:sld xmlns:a="http://schemas.openxmlformats.org/drawingml/2006/main" xmlns:r="http://schemas.openxmlformats.org/officeDocument/2006/relationships" xmlns:p="http://schemas.openxmlformats.org/presentationml/2006/main">
   <p:cSld>
     <p:spTree>
@@ -8547,7 +9421,7 @@
                   <a:schemeClr val="tx1"/>
                 </a:solidFill>
               </a:rPr>
-              <a:t>4</a:t>
+              <a:t>5</a:t>
             </a:fld>
             <a:endParaRPr lang="en-US" dirty="0">
               <a:solidFill>
@@ -8600,7 +9474,7 @@
 </p:sld>
 </file>
 
-<file path=ppt/slides/slide5.xml><?xml version="1.0" encoding="utf-8"?>
+<file path=ppt/slides/slide6.xml><?xml version="1.0" encoding="utf-8"?>
 <p:sld xmlns:a="http://schemas.openxmlformats.org/drawingml/2006/main" xmlns:r="http://schemas.openxmlformats.org/officeDocument/2006/relationships" xmlns:p="http://schemas.openxmlformats.org/presentationml/2006/main">
   <p:cSld>
     <p:spTree>
@@ -8685,7 +9559,7 @@
                   <a:schemeClr val="tx1"/>
                 </a:solidFill>
               </a:rPr>
-              <a:t>5</a:t>
+              <a:t>6</a:t>
             </a:fld>
             <a:endParaRPr lang="en-US" dirty="0">
               <a:solidFill>
@@ -8729,144 +9603,6 @@
     <p:extLst>
       <p:ext uri="{BB962C8B-B14F-4D97-AF65-F5344CB8AC3E}">
         <p14:creationId xmlns:p14="http://schemas.microsoft.com/office/powerpoint/2010/main" val="1216166001"/>
-      </p:ext>
-    </p:extLst>
-  </p:cSld>
-  <p:clrMapOvr>
-    <a:masterClrMapping/>
-  </p:clrMapOvr>
-</p:sld>
-</file>
-
-<file path=ppt/slides/slide6.xml><?xml version="1.0" encoding="utf-8"?>
-<p:sld xmlns:a="http://schemas.openxmlformats.org/drawingml/2006/main" xmlns:r="http://schemas.openxmlformats.org/officeDocument/2006/relationships" xmlns:p="http://schemas.openxmlformats.org/presentationml/2006/main">
-  <p:cSld>
-    <p:spTree>
-      <p:nvGrpSpPr>
-        <p:cNvPr id="1" name="">
-          <a:extLst>
-            <a:ext uri="{FF2B5EF4-FFF2-40B4-BE49-F238E27FC236}">
-              <a16:creationId xmlns:a16="http://schemas.microsoft.com/office/drawing/2014/main" id="{AF912508-5819-D882-0324-17B11F8A61A3}"/>
-            </a:ext>
-          </a:extLst>
-        </p:cNvPr>
-        <p:cNvGrpSpPr/>
-        <p:nvPr/>
-      </p:nvGrpSpPr>
-      <p:grpSpPr>
-        <a:xfrm>
-          <a:off x="0" y="0"/>
-          <a:ext cx="0" cy="0"/>
-          <a:chOff x="0" y="0"/>
-          <a:chExt cx="0" cy="0"/>
-        </a:xfrm>
-      </p:grpSpPr>
-      <p:sp>
-        <p:nvSpPr>
-          <p:cNvPr id="2" name="Title 1">
-            <a:extLst>
-              <a:ext uri="{FF2B5EF4-FFF2-40B4-BE49-F238E27FC236}">
-                <a16:creationId xmlns:a16="http://schemas.microsoft.com/office/drawing/2014/main" id="{CE404090-2D25-96C6-54C1-BB282D455D8C}"/>
-              </a:ext>
-            </a:extLst>
-          </p:cNvPr>
-          <p:cNvSpPr>
-            <a:spLocks noGrp="1"/>
-          </p:cNvSpPr>
-          <p:nvPr>
-            <p:ph type="title"/>
-          </p:nvPr>
-        </p:nvSpPr>
-        <p:spPr>
-          <a:xfrm>
-            <a:off x="838200" y="365125"/>
-            <a:ext cx="10515600" cy="861247"/>
-          </a:xfrm>
-        </p:spPr>
-        <p:txBody>
-          <a:bodyPr>
-            <a:normAutofit/>
-          </a:bodyPr>
-          <a:lstStyle/>
-          <a:p>
-            <a:r>
-              <a:rPr lang="ru-RU" b="1" dirty="0"/>
-              <a:t>Формализация задачи</a:t>
-            </a:r>
-          </a:p>
-        </p:txBody>
-      </p:sp>
-      <p:sp>
-        <p:nvSpPr>
-          <p:cNvPr id="10" name="Slide Number Placeholder 9">
-            <a:extLst>
-              <a:ext uri="{FF2B5EF4-FFF2-40B4-BE49-F238E27FC236}">
-                <a16:creationId xmlns:a16="http://schemas.microsoft.com/office/drawing/2014/main" id="{E8FBA160-F295-471D-3678-70B198E6B083}"/>
-              </a:ext>
-            </a:extLst>
-          </p:cNvPr>
-          <p:cNvSpPr>
-            <a:spLocks noGrp="1"/>
-          </p:cNvSpPr>
-          <p:nvPr>
-            <p:ph type="sldNum" sz="quarter" idx="12"/>
-          </p:nvPr>
-        </p:nvSpPr>
-        <p:spPr/>
-        <p:txBody>
-          <a:bodyPr/>
-          <a:lstStyle/>
-          <a:p>
-            <a:fld id="{E6EC051E-25F0-BE4E-9BA3-7274B3E06F68}" type="slidenum">
-              <a:rPr lang="en-US" smtClean="0">
-                <a:solidFill>
-                  <a:schemeClr val="tx1"/>
-                </a:solidFill>
-              </a:rPr>
-              <a:t>6</a:t>
-            </a:fld>
-            <a:endParaRPr lang="en-US" dirty="0">
-              <a:solidFill>
-                <a:schemeClr val="tx1"/>
-              </a:solidFill>
-            </a:endParaRPr>
-          </a:p>
-        </p:txBody>
-      </p:sp>
-      <p:pic>
-        <p:nvPicPr>
-          <p:cNvPr id="9" name="Рисунок 8">
-            <a:extLst>
-              <a:ext uri="{FF2B5EF4-FFF2-40B4-BE49-F238E27FC236}">
-                <a16:creationId xmlns:a16="http://schemas.microsoft.com/office/drawing/2014/main" id="{519F17E3-E02F-7397-DD84-5FB7D4EA565B}"/>
-              </a:ext>
-            </a:extLst>
-          </p:cNvPr>
-          <p:cNvPicPr>
-            <a:picLocks noChangeAspect="1"/>
-          </p:cNvPicPr>
-          <p:nvPr/>
-        </p:nvPicPr>
-        <p:blipFill>
-          <a:blip r:embed="rId2"/>
-          <a:stretch>
-            <a:fillRect/>
-          </a:stretch>
-        </p:blipFill>
-        <p:spPr>
-          <a:xfrm>
-            <a:off x="1481666" y="1226372"/>
-            <a:ext cx="9228667" cy="4633360"/>
-          </a:xfrm>
-          <a:prstGeom prst="rect">
-            <a:avLst/>
-          </a:prstGeom>
-        </p:spPr>
-      </p:pic>
-    </p:spTree>
-    <p:extLst>
-      <p:ext uri="{BB962C8B-B14F-4D97-AF65-F5344CB8AC3E}">
-        <p14:creationId xmlns:p14="http://schemas.microsoft.com/office/powerpoint/2010/main" val="2674346607"/>
       </p:ext>
     </p:extLst>
   </p:cSld>
